--- a/lecons/F4/49_F4_M2_L39_Forest_Resources_and_their_Management.pptx
+++ b/lecons/F4/49_F4_M2_L39_Forest_Resources_and_their_Management.pptx
@@ -13345,7 +13345,7 @@
         <p:spPr>
           <a:xfrm>
             <a:off x="0" y="658368"/>
-            <a:ext cx="3840480" cy="5833872"/>
+            <a:ext cx="5120640" cy="5833872"/>
           </a:xfrm>
           <a:prstGeom prst="rect">
             <a:avLst/>
@@ -13360,8 +13360,8 @@
         </p:nvSpPr>
         <p:spPr>
           <a:xfrm>
-            <a:off x="4069080" y="1005840"/>
-            <a:ext cx="7802575" cy="731520"/>
+            <a:off x="5349240" y="1005840"/>
+            <a:ext cx="6522415" cy="731520"/>
           </a:xfrm>
           <a:prstGeom prst="rect">
             <a:avLst/>
@@ -13401,8 +13401,8 @@
         </p:nvSpPr>
         <p:spPr>
           <a:xfrm>
-            <a:off x="4069080" y="1783080"/>
-            <a:ext cx="7802575" cy="4663440"/>
+            <a:off x="5349240" y="1783080"/>
+            <a:ext cx="6522415" cy="4663440"/>
           </a:xfrm>
           <a:prstGeom prst="rect">
             <a:avLst/>
@@ -13421,7 +13421,7 @@
               <a:buNone/>
             </a:pPr>
             <a:r>
-              <a:rPr lang="en-US" sz="4000" b="1" dirty="0">
+              <a:rPr lang="en-US" sz="3200" b="1" dirty="0">
                 <a:solidFill>
                   <a:srgbClr val="111111"/>
                 </a:solidFill>
@@ -13431,7 +13431,7 @@
               </a:rPr>
               <a:t>Topic: Management of Primary Resources</a:t>
             </a:r>
-            <a:endParaRPr lang="en-US" sz="4000" dirty="0"/>
+            <a:endParaRPr lang="en-US" sz="3200" dirty="0"/>
           </a:p>
           <a:p>
             <a:pPr algn="l" indent="0" marL="0">
@@ -13441,7 +13441,7 @@
               <a:buNone/>
             </a:pPr>
             <a:r>
-              <a:rPr lang="en-US" sz="4000" b="1" dirty="0">
+              <a:rPr lang="en-US" sz="3200" b="1" dirty="0">
                 <a:solidFill>
                   <a:srgbClr val="111111"/>
                 </a:solidFill>
@@ -13451,7 +13451,7 @@
               </a:rPr>
               <a:t>Sub-topic: Forestry, Fishing and Mining as Economic Activities of the Primary Sector</a:t>
             </a:r>
-            <a:endParaRPr lang="en-US" sz="4000" dirty="0"/>
+            <a:endParaRPr lang="en-US" sz="3200" dirty="0"/>
           </a:p>
           <a:p>
             <a:pPr algn="l" indent="0" marL="0">
@@ -13461,7 +13461,7 @@
               <a:buNone/>
             </a:pPr>
             <a:r>
-              <a:rPr lang="en-US" sz="4000" b="1" dirty="0">
+              <a:rPr lang="en-US" sz="3200" b="1" dirty="0">
                 <a:solidFill>
                   <a:srgbClr val="990011"/>
                 </a:solidFill>
@@ -13471,7 +13471,7 @@
               </a:rPr>
               <a:t>Lesson 39: Forest Resources and their Management</a:t>
             </a:r>
-            <a:endParaRPr lang="en-US" sz="4000" dirty="0"/>
+            <a:endParaRPr lang="en-US" sz="3200" dirty="0"/>
           </a:p>
         </p:txBody>
       </p:sp>

--- a/lecons/F4/49_F4_M2_L39_Forest_Resources_and_their_Management.pptx
+++ b/lecons/F4/49_F4_M2_L39_Forest_Resources_and_their_Management.pptx
@@ -58,9 +58,10 @@
     <p:sldId id="306" r:id="rId52"/>
     <p:sldId id="307" r:id="rId53"/>
     <p:sldId id="308" r:id="rId54"/>
+    <p:sldId id="309" r:id="rId55"/>
   </p:sldIdLst>
   <p:notesMasterIdLst>
-    <p:notesMasterId r:id="rId55"/>
+    <p:notesMasterId r:id="rId56"/>
   </p:notesMasterIdLst>
   <p:sldSz cx="12192000" cy="6858000"/>
   <p:notesSz cx="6858000" cy="12192000"/>
@@ -3194,7 +3195,7 @@
           <a:p>
             <a:r>
               <a:rPr lang="en-US" dirty="0"/>
-              <a:t>Let us copy Forest Products and their Importance. Forests are important in the following ways. On this slide we have Products and On the environment. Write each point on a new line, with the key term first, and explain it in your own words when we revise. When you finish, we go to the next slide.</a:t>
+              <a:t>Let us copy Forest Products. Forests give the following products. On this slide we have Timber, Fuelwood and Food. Write each point on a new line, with the key term first, and explain it in your own words when we revise. When you finish, we go to the next slide.</a:t>
             </a:r>
             <a:endParaRPr lang="en-US" dirty="0"/>
           </a:p>
@@ -3282,7 +3283,7 @@
           <a:p>
             <a:r>
               <a:rPr lang="en-US" dirty="0"/>
-              <a:t>We continue with Forest Products and their Importance. On this slide we have On the economy. Write each point on a new line, with the key term first, and explain it in your own words when we revise.</a:t>
+              <a:t>We continue with Forest Products. On this slide we have Medicines. Write each point on a new line, with the key term first, and explain it in your own words when we revise.</a:t>
             </a:r>
             <a:endParaRPr lang="en-US" dirty="0"/>
           </a:p>
@@ -3370,7 +3371,7 @@
           <a:p>
             <a:r>
               <a:rPr lang="en-US" dirty="0"/>
-              <a:t>Let us copy Conservation of Forest Resources. Forests are conserved in the following ways. On this slide we have Reforestation and Protected areas. Write each point on a new line, with the key term first, and explain it in your own words when we revise. When you finish, we go to the next slide.</a:t>
+              <a:t>Let us copy Importance. Forests are important in the following ways. On this slide we have On the environment and On the economy. Write each point on a new line, with the key term first, and explain it in your own words when we revise.</a:t>
             </a:r>
             <a:endParaRPr lang="en-US" dirty="0"/>
           </a:p>
@@ -3546,7 +3547,7 @@
           <a:p>
             <a:r>
               <a:rPr lang="en-US" dirty="0"/>
-              <a:t>We continue with Conservation of Forest Resources. On this slide we have Controlled logging. Write each point on a new line, with the key term first, and explain it in your own words when we revise.</a:t>
+              <a:t>Let us copy Conservation of Forest Resources. Forests are conserved in the following ways. On this slide we have Reforestation and Protected areas. Write each point on a new line, with the key term first, and explain it in your own words when we revise. When you finish, we go to the next slide.</a:t>
             </a:r>
             <a:endParaRPr lang="en-US" dirty="0"/>
           </a:p>
@@ -3634,7 +3635,7 @@
           <a:p>
             <a:r>
               <a:rPr lang="en-US" dirty="0"/>
-              <a:t>Now draw this illustration in your notebook: forests of Cameroon. Give it a title and label it clearly.</a:t>
+              <a:t>We continue with Conservation of Forest Resources. On this slide we have Controlled logging. Write each point on a new line, with the key term first, and explain it in your own words when we revise.</a:t>
             </a:r>
             <a:endParaRPr lang="en-US" dirty="0"/>
           </a:p>
@@ -3722,7 +3723,7 @@
           <a:p>
             <a:r>
               <a:rPr lang="en-US" dirty="0"/>
-              <a:t>Now let us check what you have understood. Question 1: Name four forest products. Answer in your exercise book.</a:t>
+              <a:t>Now draw this illustration in your notebook: forests of Cameroon. Give it a title and label it clearly.</a:t>
             </a:r>
             <a:endParaRPr lang="en-US" dirty="0"/>
           </a:p>
@@ -3810,7 +3811,7 @@
           <a:p>
             <a:r>
               <a:rPr lang="en-US" dirty="0"/>
-              <a:t>The expected answer is: timber, fuelwood, fruits and medicines. If you got it right, well done.</a:t>
+              <a:t>Now let us check what you have understood. Question 1: Name four forest products. Answer in your exercise book.</a:t>
             </a:r>
             <a:endParaRPr lang="en-US" dirty="0"/>
           </a:p>
@@ -3898,7 +3899,7 @@
           <a:p>
             <a:r>
               <a:rPr lang="en-US" dirty="0"/>
-              <a:t>Now let us check what you have understood. Question 2: Give two methods of conservation. Answer in your exercise book.</a:t>
+              <a:t>The expected answer is: timber, fuelwood, fruits and medicines. If you got it right, well done.</a:t>
             </a:r>
             <a:endParaRPr lang="en-US" dirty="0"/>
           </a:p>
@@ -3986,7 +3987,7 @@
           <a:p>
             <a:r>
               <a:rPr lang="en-US" dirty="0"/>
-              <a:t>The expected answer is: reforestation and protected areas. If you got it right, well done.</a:t>
+              <a:t>Now let us check what you have understood. Question 2: Give two methods of conservation. Answer in your exercise book.</a:t>
             </a:r>
             <a:endParaRPr lang="en-US" dirty="0"/>
           </a:p>
@@ -4074,7 +4075,7 @@
           <a:p>
             <a:r>
               <a:rPr lang="en-US" dirty="0"/>
-              <a:t>For those who need more practice, fill in the blanks in your exercise book. The answers are: number 1, timber; number 2, reforestation; number 3, carbon.</a:t>
+              <a:t>The expected answer is: reforestation and protected areas. If you got it right, well done.</a:t>
             </a:r>
             <a:endParaRPr lang="en-US" dirty="0"/>
           </a:p>
@@ -4162,7 +4163,7 @@
           <a:p>
             <a:r>
               <a:rPr lang="en-US" dirty="0"/>
-              <a:t>For your homework: List five forest products used in your home. We shall correct it at the beginning of our next lesson.</a:t>
+              <a:t>For those who need more practice, fill in the blanks in your exercise book. The answers are: number 1, timber; number 2, reforestation; number 3, carbon.</a:t>
             </a:r>
             <a:endParaRPr lang="en-US" dirty="0"/>
           </a:p>
@@ -4250,7 +4251,7 @@
           <a:p>
             <a:r>
               <a:rPr lang="en-US" dirty="0"/>
-              <a:t>Our next lesson will be on Lesson 40: The Management of Forest Resources in Cameroon. Thank you for your attention, and see you next time.</a:t>
+              <a:t>For your homework: List five forest products used in your home. We shall correct it at the beginning of our next lesson.</a:t>
             </a:r>
             <a:endParaRPr lang="en-US" dirty="0"/>
           </a:p>
@@ -4338,7 +4339,7 @@
           <a:p>
             <a:r>
               <a:rPr lang="en-US" dirty="0"/>
-              <a:t>Let us play the bilingual game. I say a word in English, and you give me the French word. Then we do the reverse.</a:t>
+              <a:t>Our next lesson will be on Lesson 40: The Management of Forest Resources in Cameroon. Thank you for your attention, and see you next time.</a:t>
             </a:r>
             <a:endParaRPr lang="en-US" dirty="0"/>
           </a:p>
@@ -4514,7 +4515,7 @@
           <a:p>
             <a:r>
               <a:rPr lang="en-US" dirty="0"/>
-              <a:t>I record this information in the official logbook of the class after the lesson.</a:t>
+              <a:t>Let us play the bilingual game. I say a word in English, and you give me the French word. Then we do the reverse.</a:t>
             </a:r>
             <a:endParaRPr lang="en-US" dirty="0"/>
           </a:p>
@@ -4602,7 +4603,7 @@
           <a:p>
             <a:r>
               <a:rPr lang="en-US" dirty="0"/>
-              <a:t>I complete the second page of the logbook: the matter taught, the evaluation, the homework and the attendance.</a:t>
+              <a:t>I record this information in the official logbook of the class after the lesson.</a:t>
             </a:r>
             <a:endParaRPr lang="en-US" dirty="0"/>
           </a:p>
@@ -4690,7 +4691,7 @@
           <a:p>
             <a:r>
               <a:rPr lang="en-US" dirty="0"/>
-              <a:t>This slide is for me, the teacher: it gives the timing of the lesson and what to do if the projector is not available.</a:t>
+              <a:t>I complete the second page of the logbook: the matter taught, the evaluation, the homework and the attendance.</a:t>
             </a:r>
             <a:endParaRPr lang="en-US" dirty="0"/>
           </a:p>
@@ -4778,7 +4779,7 @@
           <a:p>
             <a:r>
               <a:rPr lang="en-US" dirty="0"/>
-              <a:t>These are the references and picture credits used to prepare this lesson.</a:t>
+              <a:t>This slide is for me, the teacher: it gives the timing of the lesson and what to do if the projector is not available.</a:t>
             </a:r>
             <a:endParaRPr lang="en-US" dirty="0"/>
           </a:p>
@@ -4802,6 +4803,94 @@
             <a:fld id="{F7021451-1387-4CA6-816F-3879F97B5CBC}" type="slidenum">
               <a:rPr lang="en-US"/>
               <a:t>53</a:t>
+            </a:fld>
+            <a:endParaRPr lang="en-US"/>
+          </a:p>
+        </p:txBody>
+      </p:sp>
+    </p:spTree>
+    <p:extLst>
+      <p:ext uri="{BB962C8B-B14F-4D97-AF65-F5344CB8AC3E}">
+        <p14:creationId xmlns:p14="http://schemas.microsoft.com/office/powerpoint/2010/main" val="1024086991"/>
+      </p:ext>
+    </p:extLst>
+  </p:cSld>
+  <p:clrMapOvr>
+    <a:masterClrMapping/>
+  </p:clrMapOvr>
+</p:notes>
+</file>
+
+<file path=ppt/notesSlides/notesSlide54.xml><?xml version="1.0" encoding="utf-8"?>
+<p:notes xmlns:a="http://schemas.openxmlformats.org/drawingml/2006/main" xmlns:r="http://schemas.openxmlformats.org/officeDocument/2006/relationships" xmlns:p="http://schemas.openxmlformats.org/presentationml/2006/main">
+  <p:cSld>
+    <p:spTree>
+      <p:nvGrpSpPr>
+        <p:cNvPr id="1" name=""/>
+        <p:cNvGrpSpPr/>
+        <p:nvPr/>
+      </p:nvGrpSpPr>
+      <p:grpSpPr>
+        <a:xfrm>
+          <a:off x="0" y="0"/>
+          <a:ext cx="0" cy="0"/>
+          <a:chOff x="0" y="0"/>
+          <a:chExt cx="0" cy="0"/>
+        </a:xfrm>
+      </p:grpSpPr>
+      <p:sp>
+        <p:nvSpPr>
+          <p:cNvPr id="2" name="Slide Image Placeholder 1"/>
+          <p:cNvSpPr>
+            <a:spLocks noGrp="1" noRot="1" noChangeAspect="1"/>
+          </p:cNvSpPr>
+          <p:nvPr>
+            <p:ph type="sldImg"/>
+          </p:nvPr>
+        </p:nvSpPr>
+        <p:spPr/>
+      </p:sp>
+      <p:sp>
+        <p:nvSpPr>
+          <p:cNvPr id="3" name="Notes Placeholder 2"/>
+          <p:cNvSpPr>
+            <a:spLocks noGrp="1"/>
+          </p:cNvSpPr>
+          <p:nvPr>
+            <p:ph type="body" idx="1"/>
+          </p:nvPr>
+        </p:nvSpPr>
+        <p:spPr/>
+        <p:txBody>
+          <a:bodyPr/>
+          <a:lstStyle/>
+          <a:p>
+            <a:r>
+              <a:rPr lang="en-US" dirty="0"/>
+              <a:t>These are the references and picture credits used to prepare this lesson.</a:t>
+            </a:r>
+            <a:endParaRPr lang="en-US" dirty="0"/>
+          </a:p>
+        </p:txBody>
+      </p:sp>
+      <p:sp>
+        <p:nvSpPr>
+          <p:cNvPr id="4" name="Slide Number Placeholder 3"/>
+          <p:cNvSpPr>
+            <a:spLocks noGrp="1"/>
+          </p:cNvSpPr>
+          <p:nvPr>
+            <p:ph type="sldNum" sz="quarter" idx="10"/>
+          </p:nvPr>
+        </p:nvSpPr>
+        <p:spPr/>
+        <p:txBody>
+          <a:bodyPr/>
+          <a:lstStyle/>
+          <a:p>
+            <a:fld id="{F7021451-1387-4CA6-816F-3879F97B5CBC}" type="slidenum">
+              <a:rPr lang="en-US"/>
+              <a:t>54</a:t>
             </a:fld>
             <a:endParaRPr lang="en-US"/>
           </a:p>
@@ -14153,7 +14242,7 @@
         <p:spPr>
           <a:xfrm>
             <a:off x="0" y="658368"/>
-            <a:ext cx="1463040" cy="5833872"/>
+            <a:ext cx="2468880" cy="5833872"/>
           </a:xfrm>
           <a:prstGeom prst="rect">
             <a:avLst/>
@@ -14168,8 +14257,8 @@
         </p:nvSpPr>
         <p:spPr>
           <a:xfrm>
-            <a:off x="1691640" y="1005840"/>
-            <a:ext cx="10180015" cy="731520"/>
+            <a:off x="2697480" y="1005840"/>
+            <a:ext cx="9174175" cy="731520"/>
           </a:xfrm>
           <a:prstGeom prst="rect">
             <a:avLst/>
@@ -14209,8 +14298,47 @@
         </p:nvSpPr>
         <p:spPr>
           <a:xfrm>
-            <a:off x="1691640" y="1783080"/>
-            <a:ext cx="10180015" cy="4663440"/>
+            <a:off x="2697480" y="1737360"/>
+            <a:ext cx="9174175" cy="457200"/>
+          </a:xfrm>
+          <a:prstGeom prst="rect">
+            <a:avLst/>
+          </a:prstGeom>
+          <a:noFill/>
+          <a:ln/>
+        </p:spPr>
+        <p:txBody>
+          <a:bodyPr wrap="square" lIns="0" tIns="0" rIns="0" bIns="0" rtlCol="0" anchor="ctr"/>
+          <a:lstStyle/>
+          <a:p>
+            <a:pPr algn="l" indent="0" marL="0">
+              <a:buNone/>
+            </a:pPr>
+            <a:r>
+              <a:rPr lang="en-US" sz="3200" b="1" dirty="0">
+                <a:solidFill>
+                  <a:srgbClr val="990011"/>
+                </a:solidFill>
+                <a:latin typeface="Times New Roman" pitchFamily="34" charset="0"/>
+                <a:ea typeface="Times New Roman" pitchFamily="34" charset="-122"/>
+                <a:cs typeface="Times New Roman" pitchFamily="34" charset="-120"/>
+              </a:rPr>
+              <a:t>A) Forest Products</a:t>
+            </a:r>
+            <a:endParaRPr lang="en-US" sz="3200" dirty="0"/>
+          </a:p>
+        </p:txBody>
+      </p:sp>
+      <p:sp>
+        <p:nvSpPr>
+          <p:cNvPr id="6" name="Text 3"/>
+          <p:cNvSpPr/>
+          <p:nvPr/>
+        </p:nvSpPr>
+        <p:spPr>
+          <a:xfrm>
+            <a:off x="2697480" y="2240280"/>
+            <a:ext cx="9174175" cy="4206240"/>
           </a:xfrm>
           <a:prstGeom prst="rect">
             <a:avLst/>
@@ -14237,7 +14365,7 @@
                 <a:ea typeface="Times New Roman" pitchFamily="34" charset="-122"/>
                 <a:cs typeface="Times New Roman" pitchFamily="34" charset="-120"/>
               </a:rPr>
-              <a:t>Forests are important in the following ways:</a:t>
+              <a:t>Forests give the following products:</a:t>
             </a:r>
             <a:endParaRPr lang="en-US" sz="4000" dirty="0"/>
           </a:p>
@@ -14257,7 +14385,7 @@
                 <a:ea typeface="Times New Roman" pitchFamily="34" charset="-122"/>
                 <a:cs typeface="Times New Roman" pitchFamily="34" charset="-120"/>
               </a:rPr>
-              <a:t>Products: </a:t>
+              <a:t>Timber: </a:t>
             </a:r>
             <a:pPr algn="l" indent="0" marL="0">
               <a:spcAft>
@@ -14274,7 +14402,7 @@
                 <a:ea typeface="Times New Roman" pitchFamily="34" charset="-122"/>
                 <a:cs typeface="Times New Roman" pitchFamily="34" charset="-120"/>
               </a:rPr>
-              <a:t>They give timber, fuelwood, wild fruits, vegetables, spices and medicines.</a:t>
+              <a:t>It is used for building and furniture.</a:t>
             </a:r>
             <a:endParaRPr lang="en-US" sz="4000" dirty="0"/>
           </a:p>
@@ -14294,7 +14422,7 @@
                 <a:ea typeface="Times New Roman" pitchFamily="34" charset="-122"/>
                 <a:cs typeface="Times New Roman" pitchFamily="34" charset="-120"/>
               </a:rPr>
-              <a:t>On the environment: </a:t>
+              <a:t>Fuelwood: </a:t>
             </a:r>
             <a:pPr algn="l" indent="0" marL="0">
               <a:spcAft>
@@ -14311,7 +14439,44 @@
                 <a:ea typeface="Times New Roman" pitchFamily="34" charset="-122"/>
                 <a:cs typeface="Times New Roman" pitchFamily="34" charset="-120"/>
               </a:rPr>
-              <a:t>They absorb carbon dioxide, protect soils and water and shelter biodiversity.</a:t>
+              <a:t>It is used for cooking.</a:t>
+            </a:r>
+            <a:endParaRPr lang="en-US" sz="4000" dirty="0"/>
+          </a:p>
+          <a:p>
+            <a:pPr algn="l" indent="0" marL="0">
+              <a:spcAft>
+                <a:spcPts val="800"/>
+              </a:spcAft>
+              <a:buNone/>
+            </a:pPr>
+            <a:r>
+              <a:rPr lang="en-US" sz="4000" b="1" dirty="0">
+                <a:solidFill>
+                  <a:srgbClr val="111111"/>
+                </a:solidFill>
+                <a:latin typeface="Times New Roman" pitchFamily="34" charset="0"/>
+                <a:ea typeface="Times New Roman" pitchFamily="34" charset="-122"/>
+                <a:cs typeface="Times New Roman" pitchFamily="34" charset="-120"/>
+              </a:rPr>
+              <a:t>Food: </a:t>
+            </a:r>
+            <a:pPr algn="l" indent="0" marL="0">
+              <a:spcAft>
+                <a:spcPts val="800"/>
+              </a:spcAft>
+              <a:buNone/>
+            </a:pPr>
+            <a:r>
+              <a:rPr lang="en-US" sz="4000" dirty="0">
+                <a:solidFill>
+                  <a:srgbClr val="111111"/>
+                </a:solidFill>
+                <a:latin typeface="Times New Roman" pitchFamily="34" charset="0"/>
+                <a:ea typeface="Times New Roman" pitchFamily="34" charset="-122"/>
+                <a:cs typeface="Times New Roman" pitchFamily="34" charset="-120"/>
+              </a:rPr>
+              <a:t>Forests give wild fruits, vegetables and spices.</a:t>
             </a:r>
             <a:endParaRPr lang="en-US" sz="4000" dirty="0"/>
           </a:p>
@@ -14488,7 +14653,7 @@
                 <a:ea typeface="Times New Roman" pitchFamily="34" charset="-122"/>
                 <a:cs typeface="Times New Roman" pitchFamily="34" charset="-120"/>
               </a:rPr>
-              <a:t>2. Forest Products and their Importance (continued)</a:t>
+              <a:t>2. Forest Products and their Importance</a:t>
             </a:r>
             <a:endParaRPr lang="en-US" sz="3600" dirty="0"/>
           </a:p>
@@ -14502,8 +14667,47 @@
         </p:nvSpPr>
         <p:spPr>
           <a:xfrm>
-            <a:off x="5349240" y="1783080"/>
-            <a:ext cx="6522415" cy="4663440"/>
+            <a:off x="5349240" y="1737360"/>
+            <a:ext cx="6522415" cy="457200"/>
+          </a:xfrm>
+          <a:prstGeom prst="rect">
+            <a:avLst/>
+          </a:prstGeom>
+          <a:noFill/>
+          <a:ln/>
+        </p:spPr>
+        <p:txBody>
+          <a:bodyPr wrap="square" lIns="0" tIns="0" rIns="0" bIns="0" rtlCol="0" anchor="ctr"/>
+          <a:lstStyle/>
+          <a:p>
+            <a:pPr algn="l" indent="0" marL="0">
+              <a:buNone/>
+            </a:pPr>
+            <a:r>
+              <a:rPr lang="en-US" sz="3200" b="1" dirty="0">
+                <a:solidFill>
+                  <a:srgbClr val="990011"/>
+                </a:solidFill>
+                <a:latin typeface="Times New Roman" pitchFamily="34" charset="0"/>
+                <a:ea typeface="Times New Roman" pitchFamily="34" charset="-122"/>
+                <a:cs typeface="Times New Roman" pitchFamily="34" charset="-120"/>
+              </a:rPr>
+              <a:t>A) Forest Products (continued)</a:t>
+            </a:r>
+            <a:endParaRPr lang="en-US" sz="3200" dirty="0"/>
+          </a:p>
+        </p:txBody>
+      </p:sp>
+      <p:sp>
+        <p:nvSpPr>
+          <p:cNvPr id="6" name="Text 3"/>
+          <p:cNvSpPr/>
+          <p:nvPr/>
+        </p:nvSpPr>
+        <p:spPr>
+          <a:xfrm>
+            <a:off x="5349240" y="2240280"/>
+            <a:ext cx="6522415" cy="4206240"/>
           </a:xfrm>
           <a:prstGeom prst="rect">
             <a:avLst/>
@@ -14530,7 +14734,7 @@
                 <a:ea typeface="Times New Roman" pitchFamily="34" charset="-122"/>
                 <a:cs typeface="Times New Roman" pitchFamily="34" charset="-120"/>
               </a:rPr>
-              <a:t>On the economy: </a:t>
+              <a:t>Medicines: </a:t>
             </a:r>
             <a:pPr algn="l" indent="0" marL="0">
               <a:spcAft>
@@ -14547,7 +14751,7 @@
                 <a:ea typeface="Times New Roman" pitchFamily="34" charset="-122"/>
                 <a:cs typeface="Times New Roman" pitchFamily="34" charset="-120"/>
               </a:rPr>
-              <a:t>They provide jobs, raw materials and export income.</a:t>
+              <a:t>Many plants are used to treat diseases.</a:t>
             </a:r>
             <a:endParaRPr lang="en-US" sz="4000" dirty="0"/>
           </a:p>
@@ -14682,7 +14886,7 @@
         <p:spPr>
           <a:xfrm>
             <a:off x="0" y="658368"/>
-            <a:ext cx="3840480" cy="5833872"/>
+            <a:ext cx="1463040" cy="5833872"/>
           </a:xfrm>
           <a:prstGeom prst="rect">
             <a:avLst/>
@@ -14697,8 +14901,8 @@
         </p:nvSpPr>
         <p:spPr>
           <a:xfrm>
-            <a:off x="4069080" y="1005840"/>
-            <a:ext cx="7802575" cy="731520"/>
+            <a:off x="1691640" y="1005840"/>
+            <a:ext cx="10180015" cy="731520"/>
           </a:xfrm>
           <a:prstGeom prst="rect">
             <a:avLst/>
@@ -14724,7 +14928,7 @@
                 <a:ea typeface="Times New Roman" pitchFamily="34" charset="-122"/>
                 <a:cs typeface="Times New Roman" pitchFamily="34" charset="-120"/>
               </a:rPr>
-              <a:t>3. Conservation of Forest Resources</a:t>
+              <a:t>2. Forest Products and their Importance</a:t>
             </a:r>
             <a:endParaRPr lang="en-US" sz="3600" dirty="0"/>
           </a:p>
@@ -14738,8 +14942,47 @@
         </p:nvSpPr>
         <p:spPr>
           <a:xfrm>
-            <a:off x="4069080" y="1783080"/>
-            <a:ext cx="7802575" cy="4663440"/>
+            <a:off x="1691640" y="1737360"/>
+            <a:ext cx="10180015" cy="457200"/>
+          </a:xfrm>
+          <a:prstGeom prst="rect">
+            <a:avLst/>
+          </a:prstGeom>
+          <a:noFill/>
+          <a:ln/>
+        </p:spPr>
+        <p:txBody>
+          <a:bodyPr wrap="square" lIns="0" tIns="0" rIns="0" bIns="0" rtlCol="0" anchor="ctr"/>
+          <a:lstStyle/>
+          <a:p>
+            <a:pPr algn="l" indent="0" marL="0">
+              <a:buNone/>
+            </a:pPr>
+            <a:r>
+              <a:rPr lang="en-US" sz="3200" b="1" dirty="0">
+                <a:solidFill>
+                  <a:srgbClr val="990011"/>
+                </a:solidFill>
+                <a:latin typeface="Times New Roman" pitchFamily="34" charset="0"/>
+                <a:ea typeface="Times New Roman" pitchFamily="34" charset="-122"/>
+                <a:cs typeface="Times New Roman" pitchFamily="34" charset="-120"/>
+              </a:rPr>
+              <a:t>B) Importance</a:t>
+            </a:r>
+            <a:endParaRPr lang="en-US" sz="3200" dirty="0"/>
+          </a:p>
+        </p:txBody>
+      </p:sp>
+      <p:sp>
+        <p:nvSpPr>
+          <p:cNvPr id="6" name="Text 3"/>
+          <p:cNvSpPr/>
+          <p:nvPr/>
+        </p:nvSpPr>
+        <p:spPr>
+          <a:xfrm>
+            <a:off x="1691640" y="2240280"/>
+            <a:ext cx="10180015" cy="4206240"/>
           </a:xfrm>
           <a:prstGeom prst="rect">
             <a:avLst/>
@@ -14766,7 +15009,7 @@
                 <a:ea typeface="Times New Roman" pitchFamily="34" charset="-122"/>
                 <a:cs typeface="Times New Roman" pitchFamily="34" charset="-120"/>
               </a:rPr>
-              <a:t>Forests are conserved in the following ways:</a:t>
+              <a:t>Forests are important in the following ways:</a:t>
             </a:r>
             <a:endParaRPr lang="en-US" sz="4000" dirty="0"/>
           </a:p>
@@ -14786,7 +15029,7 @@
                 <a:ea typeface="Times New Roman" pitchFamily="34" charset="-122"/>
                 <a:cs typeface="Times New Roman" pitchFamily="34" charset="-120"/>
               </a:rPr>
-              <a:t>Reforestation: </a:t>
+              <a:t>On the environment: </a:t>
             </a:r>
             <a:pPr algn="l" indent="0" marL="0">
               <a:spcAft>
@@ -14803,7 +15046,7 @@
                 <a:ea typeface="Times New Roman" pitchFamily="34" charset="-122"/>
                 <a:cs typeface="Times New Roman" pitchFamily="34" charset="-120"/>
               </a:rPr>
-              <a:t>Trees are planted where forests have been cut.</a:t>
+              <a:t>They absorb carbon dioxide, protect soils and water and shelter biodiversity.</a:t>
             </a:r>
             <a:endParaRPr lang="en-US" sz="4000" dirty="0"/>
           </a:p>
@@ -14823,7 +15066,7 @@
                 <a:ea typeface="Times New Roman" pitchFamily="34" charset="-122"/>
                 <a:cs typeface="Times New Roman" pitchFamily="34" charset="-120"/>
               </a:rPr>
-              <a:t>Protected areas: </a:t>
+              <a:t>On the economy: </a:t>
             </a:r>
             <a:pPr algn="l" indent="0" marL="0">
               <a:spcAft>
@@ -14840,7 +15083,7 @@
                 <a:ea typeface="Times New Roman" pitchFamily="34" charset="-122"/>
                 <a:cs typeface="Times New Roman" pitchFamily="34" charset="-120"/>
               </a:rPr>
-              <a:t>National parks and reserves protect forests.</a:t>
+              <a:t>They provide jobs, raw materials and export income.</a:t>
             </a:r>
             <a:endParaRPr lang="en-US" sz="4000" dirty="0"/>
           </a:p>
@@ -15214,7 +15457,7 @@
         <p:spPr>
           <a:xfrm>
             <a:off x="0" y="658368"/>
-            <a:ext cx="5120640" cy="5833872"/>
+            <a:ext cx="3840480" cy="5833872"/>
           </a:xfrm>
           <a:prstGeom prst="rect">
             <a:avLst/>
@@ -15229,8 +15472,8 @@
         </p:nvSpPr>
         <p:spPr>
           <a:xfrm>
-            <a:off x="5349240" y="1005840"/>
-            <a:ext cx="6522415" cy="731520"/>
+            <a:off x="4069080" y="1005840"/>
+            <a:ext cx="7802575" cy="731520"/>
           </a:xfrm>
           <a:prstGeom prst="rect">
             <a:avLst/>
@@ -15256,7 +15499,7 @@
                 <a:ea typeface="Times New Roman" pitchFamily="34" charset="-122"/>
                 <a:cs typeface="Times New Roman" pitchFamily="34" charset="-120"/>
               </a:rPr>
-              <a:t>3. Conservation of Forest Resources (continued)</a:t>
+              <a:t>3. Conservation of Forest Resources</a:t>
             </a:r>
             <a:endParaRPr lang="en-US" sz="3600" dirty="0"/>
           </a:p>
@@ -15270,8 +15513,8 @@
         </p:nvSpPr>
         <p:spPr>
           <a:xfrm>
-            <a:off x="5349240" y="1783080"/>
-            <a:ext cx="6522415" cy="4663440"/>
+            <a:off x="4069080" y="1783080"/>
+            <a:ext cx="7802575" cy="4663440"/>
           </a:xfrm>
           <a:prstGeom prst="rect">
             <a:avLst/>
@@ -15290,7 +15533,7 @@
               <a:buNone/>
             </a:pPr>
             <a:r>
-              <a:rPr lang="en-US" sz="4000" b="1" dirty="0">
+              <a:rPr lang="en-US" sz="4000" i="1" dirty="0">
                 <a:solidFill>
                   <a:srgbClr val="111111"/>
                 </a:solidFill>
@@ -15298,8 +15541,11 @@
                 <a:ea typeface="Times New Roman" pitchFamily="34" charset="-122"/>
                 <a:cs typeface="Times New Roman" pitchFamily="34" charset="-120"/>
               </a:rPr>
-              <a:t>Controlled logging: </a:t>
-            </a:r>
+              <a:t>Forests are conserved in the following ways:</a:t>
+            </a:r>
+            <a:endParaRPr lang="en-US" sz="4000" dirty="0"/>
+          </a:p>
+          <a:p>
             <a:pPr algn="l" indent="0" marL="0">
               <a:spcAft>
                 <a:spcPts val="800"/>
@@ -15307,7 +15553,7 @@
               <a:buNone/>
             </a:pPr>
             <a:r>
-              <a:rPr lang="en-US" sz="4000" dirty="0">
+              <a:rPr lang="en-US" sz="4000" b="1" dirty="0">
                 <a:solidFill>
                   <a:srgbClr val="111111"/>
                 </a:solidFill>
@@ -15315,7 +15561,61 @@
                 <a:ea typeface="Times New Roman" pitchFamily="34" charset="-122"/>
                 <a:cs typeface="Times New Roman" pitchFamily="34" charset="-120"/>
               </a:rPr>
-              <a:t>Laws limit cutting and require management plans.</a:t>
+              <a:t>Reforestation: </a:t>
+            </a:r>
+            <a:pPr algn="l" indent="0" marL="0">
+              <a:spcAft>
+                <a:spcPts val="800"/>
+              </a:spcAft>
+              <a:buNone/>
+            </a:pPr>
+            <a:r>
+              <a:rPr lang="en-US" sz="4000" dirty="0">
+                <a:solidFill>
+                  <a:srgbClr val="111111"/>
+                </a:solidFill>
+                <a:latin typeface="Times New Roman" pitchFamily="34" charset="0"/>
+                <a:ea typeface="Times New Roman" pitchFamily="34" charset="-122"/>
+                <a:cs typeface="Times New Roman" pitchFamily="34" charset="-120"/>
+              </a:rPr>
+              <a:t>Trees are planted where forests have been cut.</a:t>
+            </a:r>
+            <a:endParaRPr lang="en-US" sz="4000" dirty="0"/>
+          </a:p>
+          <a:p>
+            <a:pPr algn="l" indent="0" marL="0">
+              <a:spcAft>
+                <a:spcPts val="800"/>
+              </a:spcAft>
+              <a:buNone/>
+            </a:pPr>
+            <a:r>
+              <a:rPr lang="en-US" sz="4000" b="1" dirty="0">
+                <a:solidFill>
+                  <a:srgbClr val="111111"/>
+                </a:solidFill>
+                <a:latin typeface="Times New Roman" pitchFamily="34" charset="0"/>
+                <a:ea typeface="Times New Roman" pitchFamily="34" charset="-122"/>
+                <a:cs typeface="Times New Roman" pitchFamily="34" charset="-120"/>
+              </a:rPr>
+              <a:t>Protected areas: </a:t>
+            </a:r>
+            <a:pPr algn="l" indent="0" marL="0">
+              <a:spcAft>
+                <a:spcPts val="800"/>
+              </a:spcAft>
+              <a:buNone/>
+            </a:pPr>
+            <a:r>
+              <a:rPr lang="en-US" sz="4000" dirty="0">
+                <a:solidFill>
+                  <a:srgbClr val="111111"/>
+                </a:solidFill>
+                <a:latin typeface="Times New Roman" pitchFamily="34" charset="0"/>
+                <a:ea typeface="Times New Roman" pitchFamily="34" charset="-122"/>
+                <a:cs typeface="Times New Roman" pitchFamily="34" charset="-120"/>
+              </a:rPr>
+              <a:t>National parks and reserves protect forests.</a:t>
             </a:r>
             <a:endParaRPr lang="en-US" sz="4000" dirty="0"/>
           </a:p>
@@ -15433,48 +15733,9 @@
           </a:p>
         </p:txBody>
       </p:sp>
-      <p:sp>
-        <p:nvSpPr>
-          <p:cNvPr id="3" name="Text 1"/>
-          <p:cNvSpPr/>
-          <p:nvPr/>
-        </p:nvSpPr>
-        <p:spPr>
-          <a:xfrm>
-            <a:off x="457200" y="1005840"/>
-            <a:ext cx="11277295" cy="731520"/>
-          </a:xfrm>
-          <a:prstGeom prst="rect">
-            <a:avLst/>
-          </a:prstGeom>
-          <a:noFill/>
-          <a:ln/>
-        </p:spPr>
-        <p:txBody>
-          <a:bodyPr wrap="square" lIns="0" tIns="0" rIns="0" bIns="0" rtlCol="0" anchor="ctr"/>
-          <a:lstStyle/>
-          <a:p>
-            <a:pPr algn="ctr" indent="0" marL="0">
-              <a:buNone/>
-            </a:pPr>
-            <a:r>
-              <a:rPr lang="en-US" sz="3600" b="1" dirty="0">
-                <a:solidFill>
-                  <a:srgbClr val="990011"/>
-                </a:solidFill>
-                <a:latin typeface="Times New Roman" pitchFamily="34" charset="0"/>
-                <a:ea typeface="Times New Roman" pitchFamily="34" charset="-122"/>
-                <a:cs typeface="Times New Roman" pitchFamily="34" charset="-120"/>
-              </a:rPr>
-              <a:t>3. Conservation of Forest Resources</a:t>
-            </a:r>
-            <a:endParaRPr lang="en-US" sz="3600" dirty="0"/>
-          </a:p>
-        </p:txBody>
-      </p:sp>
       <p:pic>
         <p:nvPicPr>
-          <p:cNvPr id="4" name="Image 0" descr="/home/claude/f4/img/v2/cmr_forest_big.png">    </p:cNvPr>
+          <p:cNvPr id="3" name="Image 0" descr="/home/claude/f4/img/minesec_sheet.png">    </p:cNvPr>
           <p:cNvPicPr>
             <a:picLocks noChangeAspect="1"/>
           </p:cNvPicPr>
@@ -15488,8 +15749,8 @@
         </p:blipFill>
         <p:spPr>
           <a:xfrm>
-            <a:off x="1825600" y="1783080"/>
-            <a:ext cx="8540496" cy="4270248"/>
+            <a:off x="0" y="658368"/>
+            <a:ext cx="5120640" cy="5833872"/>
           </a:xfrm>
           <a:prstGeom prst="rect">
             <a:avLst/>
@@ -15498,14 +15759,14 @@
       </p:pic>
       <p:sp>
         <p:nvSpPr>
-          <p:cNvPr id="5" name="Text 2"/>
+          <p:cNvPr id="4" name="Text 1"/>
           <p:cNvSpPr/>
           <p:nvPr/>
         </p:nvSpPr>
         <p:spPr>
           <a:xfrm>
-            <a:off x="457200" y="6089904"/>
-            <a:ext cx="11277295" cy="347472"/>
+            <a:off x="5349240" y="1005840"/>
+            <a:ext cx="6522415" cy="731520"/>
           </a:xfrm>
           <a:prstGeom prst="rect">
             <a:avLst/>
@@ -15514,24 +15775,85 @@
           <a:ln/>
         </p:spPr>
         <p:txBody>
-          <a:bodyPr wrap="square" lIns="0" tIns="0" rIns="0" bIns="0" rtlCol="0" anchor="ctr"/>
+          <a:bodyPr wrap="square" lIns="0" tIns="0" rIns="0" bIns="0" rtlCol="0" anchor="ctr">
+            <a:normAutofit/>
+          </a:bodyPr>
           <a:lstStyle/>
           <a:p>
             <a:pPr algn="ctr" indent="0" marL="0">
               <a:buNone/>
             </a:pPr>
             <a:r>
-              <a:rPr lang="en-US" sz="1800" i="1" dirty="0">
-                <a:solidFill>
-                  <a:srgbClr val="555555"/>
+              <a:rPr lang="en-US" sz="3600" b="1" dirty="0">
+                <a:solidFill>
+                  <a:srgbClr val="990011"/>
                 </a:solidFill>
                 <a:latin typeface="Times New Roman" pitchFamily="34" charset="0"/>
                 <a:ea typeface="Times New Roman" pitchFamily="34" charset="-122"/>
                 <a:cs typeface="Times New Roman" pitchFamily="34" charset="-120"/>
               </a:rPr>
-              <a:t>Illustration: forests of Cameroon</a:t>
-            </a:r>
-            <a:endParaRPr lang="en-US" sz="1800" dirty="0"/>
+              <a:t>3. Conservation of Forest Resources (continued)</a:t>
+            </a:r>
+            <a:endParaRPr lang="en-US" sz="3600" dirty="0"/>
+          </a:p>
+        </p:txBody>
+      </p:sp>
+      <p:sp>
+        <p:nvSpPr>
+          <p:cNvPr id="5" name="Text 2"/>
+          <p:cNvSpPr/>
+          <p:nvPr/>
+        </p:nvSpPr>
+        <p:spPr>
+          <a:xfrm>
+            <a:off x="5349240" y="1783080"/>
+            <a:ext cx="6522415" cy="4663440"/>
+          </a:xfrm>
+          <a:prstGeom prst="rect">
+            <a:avLst/>
+          </a:prstGeom>
+          <a:noFill/>
+          <a:ln/>
+        </p:spPr>
+        <p:txBody>
+          <a:bodyPr wrap="square" lIns="0" tIns="0" rIns="0" bIns="0" rtlCol="0" anchor="t"/>
+          <a:lstStyle/>
+          <a:p>
+            <a:pPr algn="l" indent="0" marL="0">
+              <a:spcAft>
+                <a:spcPts val="800"/>
+              </a:spcAft>
+              <a:buNone/>
+            </a:pPr>
+            <a:r>
+              <a:rPr lang="en-US" sz="4000" b="1" dirty="0">
+                <a:solidFill>
+                  <a:srgbClr val="111111"/>
+                </a:solidFill>
+                <a:latin typeface="Times New Roman" pitchFamily="34" charset="0"/>
+                <a:ea typeface="Times New Roman" pitchFamily="34" charset="-122"/>
+                <a:cs typeface="Times New Roman" pitchFamily="34" charset="-120"/>
+              </a:rPr>
+              <a:t>Controlled logging: </a:t>
+            </a:r>
+            <a:pPr algn="l" indent="0" marL="0">
+              <a:spcAft>
+                <a:spcPts val="800"/>
+              </a:spcAft>
+              <a:buNone/>
+            </a:pPr>
+            <a:r>
+              <a:rPr lang="en-US" sz="4000" dirty="0">
+                <a:solidFill>
+                  <a:srgbClr val="111111"/>
+                </a:solidFill>
+                <a:latin typeface="Times New Roman" pitchFamily="34" charset="0"/>
+                <a:ea typeface="Times New Roman" pitchFamily="34" charset="-122"/>
+                <a:cs typeface="Times New Roman" pitchFamily="34" charset="-120"/>
+              </a:rPr>
+              <a:t>Laws limit cutting and require management plans.</a:t>
+            </a:r>
+            <a:endParaRPr lang="en-US" sz="4000" dirty="0"/>
           </a:p>
         </p:txBody>
       </p:sp>
@@ -15641,15 +15963,54 @@
                 <a:ea typeface="Calibri" pitchFamily="34" charset="-122"/>
                 <a:cs typeface="Calibri" pitchFamily="34" charset="-120"/>
               </a:rPr>
-              <a:t>FORMATIVE EVALUATION</a:t>
+              <a:t>BOARD SUMMARY</a:t>
             </a:r>
             <a:endParaRPr lang="en-US" sz="1400" dirty="0"/>
+          </a:p>
+        </p:txBody>
+      </p:sp>
+      <p:sp>
+        <p:nvSpPr>
+          <p:cNvPr id="3" name="Text 1"/>
+          <p:cNvSpPr/>
+          <p:nvPr/>
+        </p:nvSpPr>
+        <p:spPr>
+          <a:xfrm>
+            <a:off x="457200" y="1005840"/>
+            <a:ext cx="11277295" cy="731520"/>
+          </a:xfrm>
+          <a:prstGeom prst="rect">
+            <a:avLst/>
+          </a:prstGeom>
+          <a:noFill/>
+          <a:ln/>
+        </p:spPr>
+        <p:txBody>
+          <a:bodyPr wrap="square" lIns="0" tIns="0" rIns="0" bIns="0" rtlCol="0" anchor="ctr"/>
+          <a:lstStyle/>
+          <a:p>
+            <a:pPr algn="ctr" indent="0" marL="0">
+              <a:buNone/>
+            </a:pPr>
+            <a:r>
+              <a:rPr lang="en-US" sz="3600" b="1" dirty="0">
+                <a:solidFill>
+                  <a:srgbClr val="990011"/>
+                </a:solidFill>
+                <a:latin typeface="Times New Roman" pitchFamily="34" charset="0"/>
+                <a:ea typeface="Times New Roman" pitchFamily="34" charset="-122"/>
+                <a:cs typeface="Times New Roman" pitchFamily="34" charset="-120"/>
+              </a:rPr>
+              <a:t>3. Conservation of Forest Resources</a:t>
+            </a:r>
+            <a:endParaRPr lang="en-US" sz="3600" dirty="0"/>
           </a:p>
         </p:txBody>
       </p:sp>
       <p:pic>
         <p:nvPicPr>
-          <p:cNvPr id="3" name="Image 0" descr="/home/claude/f4/img/minesec_sheet.png">    </p:cNvPr>
+          <p:cNvPr id="4" name="Image 0" descr="/home/claude/f4/img/v2/cmr_forest_big.png">    </p:cNvPr>
           <p:cNvPicPr>
             <a:picLocks noChangeAspect="1"/>
           </p:cNvPicPr>
@@ -15663,8 +16024,8 @@
         </p:blipFill>
         <p:spPr>
           <a:xfrm>
-            <a:off x="0" y="658368"/>
-            <a:ext cx="5120640" cy="5833872"/>
+            <a:off x="1825600" y="1783080"/>
+            <a:ext cx="8540496" cy="4270248"/>
           </a:xfrm>
           <a:prstGeom prst="rect">
             <a:avLst/>
@@ -15673,14 +16034,14 @@
       </p:pic>
       <p:sp>
         <p:nvSpPr>
-          <p:cNvPr id="4" name="Text 1"/>
+          <p:cNvPr id="5" name="Text 2"/>
           <p:cNvSpPr/>
           <p:nvPr/>
         </p:nvSpPr>
         <p:spPr>
           <a:xfrm>
-            <a:off x="5349240" y="1005840"/>
-            <a:ext cx="6522415" cy="731520"/>
+            <a:off x="457200" y="6089904"/>
+            <a:ext cx="11277295" cy="347472"/>
           </a:xfrm>
           <a:prstGeom prst="rect">
             <a:avLst/>
@@ -15689,68 +16050,24 @@
           <a:ln/>
         </p:spPr>
         <p:txBody>
-          <a:bodyPr wrap="square" lIns="0" tIns="0" rIns="0" bIns="0" rtlCol="0" anchor="ctr">
-            <a:normAutofit/>
-          </a:bodyPr>
+          <a:bodyPr wrap="square" lIns="0" tIns="0" rIns="0" bIns="0" rtlCol="0" anchor="ctr"/>
           <a:lstStyle/>
           <a:p>
             <a:pPr algn="ctr" indent="0" marL="0">
               <a:buNone/>
             </a:pPr>
             <a:r>
-              <a:rPr lang="en-US" sz="3600" b="1" dirty="0">
-                <a:solidFill>
-                  <a:srgbClr val="990011"/>
+              <a:rPr lang="en-US" sz="1800" i="1" dirty="0">
+                <a:solidFill>
+                  <a:srgbClr val="555555"/>
                 </a:solidFill>
                 <a:latin typeface="Times New Roman" pitchFamily="34" charset="0"/>
                 <a:ea typeface="Times New Roman" pitchFamily="34" charset="-122"/>
                 <a:cs typeface="Times New Roman" pitchFamily="34" charset="-120"/>
               </a:rPr>
-              <a:t>Evaluation 1</a:t>
-            </a:r>
-            <a:endParaRPr lang="en-US" sz="3600" dirty="0"/>
-          </a:p>
-        </p:txBody>
-      </p:sp>
-      <p:sp>
-        <p:nvSpPr>
-          <p:cNvPr id="5" name="Text 2"/>
-          <p:cNvSpPr/>
-          <p:nvPr/>
-        </p:nvSpPr>
-        <p:spPr>
-          <a:xfrm>
-            <a:off x="5349240" y="1783080"/>
-            <a:ext cx="6522415" cy="4663440"/>
-          </a:xfrm>
-          <a:prstGeom prst="rect">
-            <a:avLst/>
-          </a:prstGeom>
-          <a:noFill/>
-          <a:ln/>
-        </p:spPr>
-        <p:txBody>
-          <a:bodyPr wrap="square" lIns="0" tIns="0" rIns="0" bIns="0" rtlCol="0" anchor="t"/>
-          <a:lstStyle/>
-          <a:p>
-            <a:pPr algn="l" indent="0" marL="0">
-              <a:spcAft>
-                <a:spcPts val="800"/>
-              </a:spcAft>
-              <a:buNone/>
-            </a:pPr>
-            <a:r>
-              <a:rPr lang="en-US" sz="4000" dirty="0">
-                <a:solidFill>
-                  <a:srgbClr val="111111"/>
-                </a:solidFill>
-                <a:latin typeface="Times New Roman" pitchFamily="34" charset="0"/>
-                <a:ea typeface="Times New Roman" pitchFamily="34" charset="-122"/>
-                <a:cs typeface="Times New Roman" pitchFamily="34" charset="-120"/>
-              </a:rPr>
-              <a:t>Name four forest products.</a:t>
-            </a:r>
-            <a:endParaRPr lang="en-US" sz="4000" dirty="0"/>
+              <a:t>Illustration: forests of Cameroon</a:t>
+            </a:r>
+            <a:endParaRPr lang="en-US" sz="1800" dirty="0"/>
           </a:p>
         </p:txBody>
       </p:sp>
@@ -15925,7 +16242,7 @@
                 <a:ea typeface="Times New Roman" pitchFamily="34" charset="-122"/>
                 <a:cs typeface="Times New Roman" pitchFamily="34" charset="-120"/>
               </a:rPr>
-              <a:t>Expected Answer</a:t>
+              <a:t>Evaluation 1</a:t>
             </a:r>
             <a:endParaRPr lang="en-US" sz="3600" dirty="0"/>
           </a:p>
@@ -15967,7 +16284,7 @@
                 <a:ea typeface="Times New Roman" pitchFamily="34" charset="-122"/>
                 <a:cs typeface="Times New Roman" pitchFamily="34" charset="-120"/>
               </a:rPr>
-              <a:t>Timber, fuelwood, fruits and medicines.</a:t>
+              <a:t>Name four forest products.</a:t>
             </a:r>
             <a:endParaRPr lang="en-US" sz="4000" dirty="0"/>
           </a:p>
@@ -16144,7 +16461,7 @@
                 <a:ea typeface="Times New Roman" pitchFamily="34" charset="-122"/>
                 <a:cs typeface="Times New Roman" pitchFamily="34" charset="-120"/>
               </a:rPr>
-              <a:t>Evaluation 2</a:t>
+              <a:t>Expected Answer</a:t>
             </a:r>
             <a:endParaRPr lang="en-US" sz="3600" dirty="0"/>
           </a:p>
@@ -16186,7 +16503,7 @@
                 <a:ea typeface="Times New Roman" pitchFamily="34" charset="-122"/>
                 <a:cs typeface="Times New Roman" pitchFamily="34" charset="-120"/>
               </a:rPr>
-              <a:t>Give two methods of conservation.</a:t>
+              <a:t>Timber, fuelwood, fruits and medicines.</a:t>
             </a:r>
             <a:endParaRPr lang="en-US" sz="4000" dirty="0"/>
           </a:p>
@@ -16363,7 +16680,7 @@
                 <a:ea typeface="Times New Roman" pitchFamily="34" charset="-122"/>
                 <a:cs typeface="Times New Roman" pitchFamily="34" charset="-120"/>
               </a:rPr>
-              <a:t>Expected Answer</a:t>
+              <a:t>Evaluation 2</a:t>
             </a:r>
             <a:endParaRPr lang="en-US" sz="3600" dirty="0"/>
           </a:p>
@@ -16405,7 +16722,7 @@
                 <a:ea typeface="Times New Roman" pitchFamily="34" charset="-122"/>
                 <a:cs typeface="Times New Roman" pitchFamily="34" charset="-120"/>
               </a:rPr>
-              <a:t>Reforestation and protected areas.</a:t>
+              <a:t>Give two methods of conservation.</a:t>
             </a:r>
             <a:endParaRPr lang="en-US" sz="4000" dirty="0"/>
           </a:p>
@@ -16517,7 +16834,7 @@
                 <a:ea typeface="Calibri" pitchFamily="34" charset="-122"/>
                 <a:cs typeface="Calibri" pitchFamily="34" charset="-120"/>
               </a:rPr>
-              <a:t>REMEDIATION</a:t>
+              <a:t>FORMATIVE EVALUATION</a:t>
             </a:r>
             <a:endParaRPr lang="en-US" sz="1400" dirty="0"/>
           </a:p>
@@ -16540,7 +16857,7 @@
         <p:spPr>
           <a:xfrm>
             <a:off x="0" y="658368"/>
-            <a:ext cx="3840480" cy="5833872"/>
+            <a:ext cx="5120640" cy="5833872"/>
           </a:xfrm>
           <a:prstGeom prst="rect">
             <a:avLst/>
@@ -16555,8 +16872,8 @@
         </p:nvSpPr>
         <p:spPr>
           <a:xfrm>
-            <a:off x="4069080" y="1005840"/>
-            <a:ext cx="7802575" cy="731520"/>
+            <a:off x="5349240" y="1005840"/>
+            <a:ext cx="6522415" cy="731520"/>
           </a:xfrm>
           <a:prstGeom prst="rect">
             <a:avLst/>
@@ -16582,7 +16899,7 @@
                 <a:ea typeface="Times New Roman" pitchFamily="34" charset="-122"/>
                 <a:cs typeface="Times New Roman" pitchFamily="34" charset="-120"/>
               </a:rPr>
-              <a:t>Remediation</a:t>
+              <a:t>Expected Answer</a:t>
             </a:r>
             <a:endParaRPr lang="en-US" sz="3600" dirty="0"/>
           </a:p>
@@ -16596,8 +16913,8 @@
         </p:nvSpPr>
         <p:spPr>
           <a:xfrm>
-            <a:off x="4069080" y="1783080"/>
-            <a:ext cx="7802575" cy="4663440"/>
+            <a:off x="5349240" y="1783080"/>
+            <a:ext cx="6522415" cy="4663440"/>
           </a:xfrm>
           <a:prstGeom prst="rect">
             <a:avLst/>
@@ -16616,7 +16933,7 @@
               <a:buNone/>
             </a:pPr>
             <a:r>
-              <a:rPr lang="en-US" sz="4000" b="1" dirty="0">
+              <a:rPr lang="en-US" sz="4000" dirty="0">
                 <a:solidFill>
                   <a:srgbClr val="111111"/>
                 </a:solidFill>
@@ -16624,73 +16941,7 @@
                 <a:ea typeface="Times New Roman" pitchFamily="34" charset="-122"/>
                 <a:cs typeface="Times New Roman" pitchFamily="34" charset="-120"/>
               </a:rPr>
-              <a:t>Fill in the blanks:</a:t>
-            </a:r>
-            <a:endParaRPr lang="en-US" sz="4000" dirty="0"/>
-          </a:p>
-          <a:p>
-            <a:pPr algn="l" marL="342900" indent="-342900">
-              <a:spcAft>
-                <a:spcPts val="800"/>
-              </a:spcAft>
-              <a:buSzPct val="100000"/>
-              <a:buFont typeface="+mj-lt"/>
-              <a:buAutoNum type="arabicPeriod" startAt="1"/>
-            </a:pPr>
-            <a:r>
-              <a:rPr lang="en-US" sz="4000" dirty="0">
-                <a:solidFill>
-                  <a:srgbClr val="111111"/>
-                </a:solidFill>
-                <a:latin typeface="Times New Roman" pitchFamily="34" charset="0"/>
-                <a:ea typeface="Times New Roman" pitchFamily="34" charset="-122"/>
-                <a:cs typeface="Times New Roman" pitchFamily="34" charset="-120"/>
-              </a:rPr>
-              <a:t>Wood used for building is ______.</a:t>
-            </a:r>
-            <a:endParaRPr lang="en-US" sz="4000" dirty="0"/>
-          </a:p>
-          <a:p>
-            <a:pPr algn="l" marL="342900" indent="-342900">
-              <a:spcAft>
-                <a:spcPts val="800"/>
-              </a:spcAft>
-              <a:buSzPct val="100000"/>
-              <a:buFont typeface="+mj-lt"/>
-              <a:buAutoNum type="arabicPeriod" startAt="1"/>
-            </a:pPr>
-            <a:r>
-              <a:rPr lang="en-US" sz="4000" dirty="0">
-                <a:solidFill>
-                  <a:srgbClr val="111111"/>
-                </a:solidFill>
-                <a:latin typeface="Times New Roman" pitchFamily="34" charset="0"/>
-                <a:ea typeface="Times New Roman" pitchFamily="34" charset="-122"/>
-                <a:cs typeface="Times New Roman" pitchFamily="34" charset="-120"/>
-              </a:rPr>
-              <a:t>Planting trees where they were cut is ______.</a:t>
-            </a:r>
-            <a:endParaRPr lang="en-US" sz="4000" dirty="0"/>
-          </a:p>
-          <a:p>
-            <a:pPr algn="l" marL="342900" indent="-342900">
-              <a:spcAft>
-                <a:spcPts val="800"/>
-              </a:spcAft>
-              <a:buSzPct val="100000"/>
-              <a:buFont typeface="+mj-lt"/>
-              <a:buAutoNum type="arabicPeriod" startAt="1"/>
-            </a:pPr>
-            <a:r>
-              <a:rPr lang="en-US" sz="4000" dirty="0">
-                <a:solidFill>
-                  <a:srgbClr val="111111"/>
-                </a:solidFill>
-                <a:latin typeface="Times New Roman" pitchFamily="34" charset="0"/>
-                <a:ea typeface="Times New Roman" pitchFamily="34" charset="-122"/>
-                <a:cs typeface="Times New Roman" pitchFamily="34" charset="-120"/>
-              </a:rPr>
-              <a:t>Forests absorb ______ dioxide.</a:t>
+              <a:t>Reforestation and protected areas.</a:t>
             </a:r>
             <a:endParaRPr lang="en-US" sz="4000" dirty="0"/>
           </a:p>
@@ -16802,7 +17053,7 @@
                 <a:ea typeface="Calibri" pitchFamily="34" charset="-122"/>
                 <a:cs typeface="Calibri" pitchFamily="34" charset="-120"/>
               </a:rPr>
-              <a:t>HOMEWORK</a:t>
+              <a:t>REMEDIATION</a:t>
             </a:r>
             <a:endParaRPr lang="en-US" sz="1400" dirty="0"/>
           </a:p>
@@ -16825,7 +17076,7 @@
         <p:spPr>
           <a:xfrm>
             <a:off x="0" y="658368"/>
-            <a:ext cx="5120640" cy="5833872"/>
+            <a:ext cx="3840480" cy="5833872"/>
           </a:xfrm>
           <a:prstGeom prst="rect">
             <a:avLst/>
@@ -16840,8 +17091,8 @@
         </p:nvSpPr>
         <p:spPr>
           <a:xfrm>
-            <a:off x="5349240" y="1005840"/>
-            <a:ext cx="6522415" cy="731520"/>
+            <a:off x="4069080" y="1005840"/>
+            <a:ext cx="7802575" cy="731520"/>
           </a:xfrm>
           <a:prstGeom prst="rect">
             <a:avLst/>
@@ -16867,7 +17118,7 @@
                 <a:ea typeface="Times New Roman" pitchFamily="34" charset="-122"/>
                 <a:cs typeface="Times New Roman" pitchFamily="34" charset="-120"/>
               </a:rPr>
-              <a:t>Homework</a:t>
+              <a:t>Remediation</a:t>
             </a:r>
             <a:endParaRPr lang="en-US" sz="3600" dirty="0"/>
           </a:p>
@@ -16881,8 +17132,8 @@
         </p:nvSpPr>
         <p:spPr>
           <a:xfrm>
-            <a:off x="5349240" y="1783080"/>
-            <a:ext cx="6522415" cy="4663440"/>
+            <a:off x="4069080" y="1783080"/>
+            <a:ext cx="7802575" cy="4663440"/>
           </a:xfrm>
           <a:prstGeom prst="rect">
             <a:avLst/>
@@ -16901,7 +17152,7 @@
               <a:buNone/>
             </a:pPr>
             <a:r>
-              <a:rPr lang="en-US" sz="4000" dirty="0">
+              <a:rPr lang="en-US" sz="4000" b="1" dirty="0">
                 <a:solidFill>
                   <a:srgbClr val="111111"/>
                 </a:solidFill>
@@ -16909,7 +17160,73 @@
                 <a:ea typeface="Times New Roman" pitchFamily="34" charset="-122"/>
                 <a:cs typeface="Times New Roman" pitchFamily="34" charset="-120"/>
               </a:rPr>
-              <a:t>List five forest products used in your home.</a:t>
+              <a:t>Fill in the blanks:</a:t>
+            </a:r>
+            <a:endParaRPr lang="en-US" sz="4000" dirty="0"/>
+          </a:p>
+          <a:p>
+            <a:pPr algn="l" marL="342900" indent="-342900">
+              <a:spcAft>
+                <a:spcPts val="800"/>
+              </a:spcAft>
+              <a:buSzPct val="100000"/>
+              <a:buFont typeface="+mj-lt"/>
+              <a:buAutoNum type="arabicPeriod" startAt="1"/>
+            </a:pPr>
+            <a:r>
+              <a:rPr lang="en-US" sz="4000" dirty="0">
+                <a:solidFill>
+                  <a:srgbClr val="111111"/>
+                </a:solidFill>
+                <a:latin typeface="Times New Roman" pitchFamily="34" charset="0"/>
+                <a:ea typeface="Times New Roman" pitchFamily="34" charset="-122"/>
+                <a:cs typeface="Times New Roman" pitchFamily="34" charset="-120"/>
+              </a:rPr>
+              <a:t>Wood used for building is ______.</a:t>
+            </a:r>
+            <a:endParaRPr lang="en-US" sz="4000" dirty="0"/>
+          </a:p>
+          <a:p>
+            <a:pPr algn="l" marL="342900" indent="-342900">
+              <a:spcAft>
+                <a:spcPts val="800"/>
+              </a:spcAft>
+              <a:buSzPct val="100000"/>
+              <a:buFont typeface="+mj-lt"/>
+              <a:buAutoNum type="arabicPeriod" startAt="1"/>
+            </a:pPr>
+            <a:r>
+              <a:rPr lang="en-US" sz="4000" dirty="0">
+                <a:solidFill>
+                  <a:srgbClr val="111111"/>
+                </a:solidFill>
+                <a:latin typeface="Times New Roman" pitchFamily="34" charset="0"/>
+                <a:ea typeface="Times New Roman" pitchFamily="34" charset="-122"/>
+                <a:cs typeface="Times New Roman" pitchFamily="34" charset="-120"/>
+              </a:rPr>
+              <a:t>Planting trees where they were cut is ______.</a:t>
+            </a:r>
+            <a:endParaRPr lang="en-US" sz="4000" dirty="0"/>
+          </a:p>
+          <a:p>
+            <a:pPr algn="l" marL="342900" indent="-342900">
+              <a:spcAft>
+                <a:spcPts val="800"/>
+              </a:spcAft>
+              <a:buSzPct val="100000"/>
+              <a:buFont typeface="+mj-lt"/>
+              <a:buAutoNum type="arabicPeriod" startAt="1"/>
+            </a:pPr>
+            <a:r>
+              <a:rPr lang="en-US" sz="4000" dirty="0">
+                <a:solidFill>
+                  <a:srgbClr val="111111"/>
+                </a:solidFill>
+                <a:latin typeface="Times New Roman" pitchFamily="34" charset="0"/>
+                <a:ea typeface="Times New Roman" pitchFamily="34" charset="-122"/>
+                <a:cs typeface="Times New Roman" pitchFamily="34" charset="-120"/>
+              </a:rPr>
+              <a:t>Forests absorb ______ dioxide.</a:t>
             </a:r>
             <a:endParaRPr lang="en-US" sz="4000" dirty="0"/>
           </a:p>
@@ -17021,7 +17338,7 @@
                 <a:ea typeface="Calibri" pitchFamily="34" charset="-122"/>
                 <a:cs typeface="Calibri" pitchFamily="34" charset="-120"/>
               </a:rPr>
-              <a:t>NEXT LESSON</a:t>
+              <a:t>HOMEWORK</a:t>
             </a:r>
             <a:endParaRPr lang="en-US" sz="1400" dirty="0"/>
           </a:p>
@@ -17086,7 +17403,7 @@
                 <a:ea typeface="Times New Roman" pitchFamily="34" charset="-122"/>
                 <a:cs typeface="Times New Roman" pitchFamily="34" charset="-120"/>
               </a:rPr>
-              <a:t>Next Lesson</a:t>
+              <a:t>Homework</a:t>
             </a:r>
             <a:endParaRPr lang="en-US" sz="3600" dirty="0"/>
           </a:p>
@@ -17110,17 +17427,17 @@
           <a:ln/>
         </p:spPr>
         <p:txBody>
-          <a:bodyPr wrap="square" lIns="0" tIns="0" rIns="0" bIns="0" rtlCol="0" anchor="ctr"/>
-          <a:lstStyle/>
-          <a:p>
-            <a:pPr algn="ctr" indent="0" marL="0">
+          <a:bodyPr wrap="square" lIns="0" tIns="0" rIns="0" bIns="0" rtlCol="0" anchor="t"/>
+          <a:lstStyle/>
+          <a:p>
+            <a:pPr algn="l" indent="0" marL="0">
               <a:spcAft>
                 <a:spcPts val="800"/>
               </a:spcAft>
               <a:buNone/>
             </a:pPr>
             <a:r>
-              <a:rPr lang="en-US" sz="4000" b="1" dirty="0">
+              <a:rPr lang="en-US" sz="4000" dirty="0">
                 <a:solidFill>
                   <a:srgbClr val="111111"/>
                 </a:solidFill>
@@ -17128,27 +17445,7 @@
                 <a:ea typeface="Times New Roman" pitchFamily="34" charset="-122"/>
                 <a:cs typeface="Times New Roman" pitchFamily="34" charset="-120"/>
               </a:rPr>
-              <a:t>Our next lesson will be on:</a:t>
-            </a:r>
-            <a:endParaRPr lang="en-US" sz="4000" dirty="0"/>
-          </a:p>
-          <a:p>
-            <a:pPr algn="ctr" indent="0" marL="0">
-              <a:spcAft>
-                <a:spcPts val="800"/>
-              </a:spcAft>
-              <a:buNone/>
-            </a:pPr>
-            <a:r>
-              <a:rPr lang="en-US" sz="4000" b="1" dirty="0">
-                <a:solidFill>
-                  <a:srgbClr val="990011"/>
-                </a:solidFill>
-                <a:latin typeface="Times New Roman" pitchFamily="34" charset="0"/>
-                <a:ea typeface="Times New Roman" pitchFamily="34" charset="-122"/>
-                <a:cs typeface="Times New Roman" pitchFamily="34" charset="-120"/>
-              </a:rPr>
-              <a:t>Lesson 40: The Management of Forest Resources in Cameroon</a:t>
+              <a:t>List five forest products used in your home.</a:t>
             </a:r>
             <a:endParaRPr lang="en-US" sz="4000" dirty="0"/>
           </a:p>
@@ -17260,6 +17557,464 @@
                 <a:ea typeface="Calibri" pitchFamily="34" charset="-122"/>
                 <a:cs typeface="Calibri" pitchFamily="34" charset="-120"/>
               </a:rPr>
+              <a:t>NEXT LESSON</a:t>
+            </a:r>
+            <a:endParaRPr lang="en-US" sz="1400" dirty="0"/>
+          </a:p>
+        </p:txBody>
+      </p:sp>
+      <p:pic>
+        <p:nvPicPr>
+          <p:cNvPr id="3" name="Image 0" descr="/home/claude/f4/img/minesec_sheet.png">    </p:cNvPr>
+          <p:cNvPicPr>
+            <a:picLocks noChangeAspect="1"/>
+          </p:cNvPicPr>
+          <p:nvPr/>
+        </p:nvPicPr>
+        <p:blipFill>
+          <a:blip r:embed="rId1"/>
+          <a:stretch>
+            <a:fillRect/>
+          </a:stretch>
+        </p:blipFill>
+        <p:spPr>
+          <a:xfrm>
+            <a:off x="0" y="658368"/>
+            <a:ext cx="5120640" cy="5833872"/>
+          </a:xfrm>
+          <a:prstGeom prst="rect">
+            <a:avLst/>
+          </a:prstGeom>
+        </p:spPr>
+      </p:pic>
+      <p:sp>
+        <p:nvSpPr>
+          <p:cNvPr id="4" name="Text 1"/>
+          <p:cNvSpPr/>
+          <p:nvPr/>
+        </p:nvSpPr>
+        <p:spPr>
+          <a:xfrm>
+            <a:off x="5349240" y="1005840"/>
+            <a:ext cx="6522415" cy="731520"/>
+          </a:xfrm>
+          <a:prstGeom prst="rect">
+            <a:avLst/>
+          </a:prstGeom>
+          <a:noFill/>
+          <a:ln/>
+        </p:spPr>
+        <p:txBody>
+          <a:bodyPr wrap="square" lIns="0" tIns="0" rIns="0" bIns="0" rtlCol="0" anchor="ctr">
+            <a:normAutofit/>
+          </a:bodyPr>
+          <a:lstStyle/>
+          <a:p>
+            <a:pPr algn="ctr" indent="0" marL="0">
+              <a:buNone/>
+            </a:pPr>
+            <a:r>
+              <a:rPr lang="en-US" sz="3600" b="1" dirty="0">
+                <a:solidFill>
+                  <a:srgbClr val="990011"/>
+                </a:solidFill>
+                <a:latin typeface="Times New Roman" pitchFamily="34" charset="0"/>
+                <a:ea typeface="Times New Roman" pitchFamily="34" charset="-122"/>
+                <a:cs typeface="Times New Roman" pitchFamily="34" charset="-120"/>
+              </a:rPr>
+              <a:t>Next Lesson</a:t>
+            </a:r>
+            <a:endParaRPr lang="en-US" sz="3600" dirty="0"/>
+          </a:p>
+        </p:txBody>
+      </p:sp>
+      <p:sp>
+        <p:nvSpPr>
+          <p:cNvPr id="5" name="Text 2"/>
+          <p:cNvSpPr/>
+          <p:nvPr/>
+        </p:nvSpPr>
+        <p:spPr>
+          <a:xfrm>
+            <a:off x="5349240" y="1783080"/>
+            <a:ext cx="6522415" cy="4663440"/>
+          </a:xfrm>
+          <a:prstGeom prst="rect">
+            <a:avLst/>
+          </a:prstGeom>
+          <a:noFill/>
+          <a:ln/>
+        </p:spPr>
+        <p:txBody>
+          <a:bodyPr wrap="square" lIns="0" tIns="0" rIns="0" bIns="0" rtlCol="0" anchor="ctr"/>
+          <a:lstStyle/>
+          <a:p>
+            <a:pPr algn="ctr" indent="0" marL="0">
+              <a:spcAft>
+                <a:spcPts val="800"/>
+              </a:spcAft>
+              <a:buNone/>
+            </a:pPr>
+            <a:r>
+              <a:rPr lang="en-US" sz="4000" b="1" dirty="0">
+                <a:solidFill>
+                  <a:srgbClr val="111111"/>
+                </a:solidFill>
+                <a:latin typeface="Times New Roman" pitchFamily="34" charset="0"/>
+                <a:ea typeface="Times New Roman" pitchFamily="34" charset="-122"/>
+                <a:cs typeface="Times New Roman" pitchFamily="34" charset="-120"/>
+              </a:rPr>
+              <a:t>Our next lesson will be on:</a:t>
+            </a:r>
+            <a:endParaRPr lang="en-US" sz="4000" dirty="0"/>
+          </a:p>
+          <a:p>
+            <a:pPr algn="ctr" indent="0" marL="0">
+              <a:spcAft>
+                <a:spcPts val="800"/>
+              </a:spcAft>
+              <a:buNone/>
+            </a:pPr>
+            <a:r>
+              <a:rPr lang="en-US" sz="4000" b="1" dirty="0">
+                <a:solidFill>
+                  <a:srgbClr val="990011"/>
+                </a:solidFill>
+                <a:latin typeface="Times New Roman" pitchFamily="34" charset="0"/>
+                <a:ea typeface="Times New Roman" pitchFamily="34" charset="-122"/>
+                <a:cs typeface="Times New Roman" pitchFamily="34" charset="-120"/>
+              </a:rPr>
+              <a:t>Lesson 40: The Management of Forest Resources in Cameroon</a:t>
+            </a:r>
+            <a:endParaRPr lang="en-US" sz="4000" dirty="0"/>
+          </a:p>
+        </p:txBody>
+      </p:sp>
+      <p:sp>
+        <p:nvSpPr>
+          <p:cNvPr id="25" name="Slide Number Placeholder 0"/>
+          <p:cNvSpPr>
+            <a:spLocks noGrp="1"/>
+          </p:cNvSpPr>
+          <p:nvPr>
+            <p:ph type="sldNum" sz="quarter" idx="4294967295"/>
+          </p:nvPr>
+        </p:nvSpPr>
+        <p:spPr>
+          <a:xfrm>
+            <a:off x="27432" y="91440"/>
+            <a:ext cx="585216" cy="475488"/>
+          </a:xfrm>
+          <a:prstGeom prst="rect">
+            <a:avLst/>
+          </a:prstGeom>
+          <a:extLst>
+            <a:ext uri="{C572A759-6A51-4108-AA02-DFA0A04FC94B}">
+              <ma14:wrappingTextBoxFlag xmlns:ma14="http://schemas.microsoft.com/office/mac/drawingml/2011/main" val="0"/>
+            </a:ext>
+          </a:extLst>
+        </p:spPr>
+        <p:txBody>
+          <a:bodyPr/>
+          <a:lstStyle>
+            <a:lvl1pPr>
+              <a:defRPr sz="2000">
+                <a:solidFill>
+                  <a:srgbClr val="FFFFFF"/>
+                </a:solidFill>
+                <a:latin typeface="Calibri"/>
+                <a:ea typeface="Calibri"/>
+                <a:cs typeface="Calibri"/>
+              </a:defRPr>
+            </a:lvl1pPr>
+          </a:lstStyle>
+          <a:p>
+            <a:pPr algn="ctr"/>
+            <a:fld id="{F7021451-1387-4CA6-816F-3879F97B5CBC}" type="slidenum">
+              <a:rPr b="1" lang="en-US"/>
+              <a:t>49</a:t>
+            </a:fld>
+            <a:endParaRPr lang="en-US"/>
+          </a:p>
+        </p:txBody>
+      </p:sp>
+    </p:spTree>
+  </p:cSld>
+  <p:clrMapOvr>
+    <a:masterClrMapping/>
+  </p:clrMapOvr>
+</p:sld>
+</file>
+
+<file path=ppt/slides/slide5.xml><?xml version="1.0" encoding="utf-8"?>
+<p:sld xmlns:a="http://schemas.openxmlformats.org/drawingml/2006/main" xmlns:r="http://schemas.openxmlformats.org/officeDocument/2006/relationships" xmlns:p="http://schemas.openxmlformats.org/presentationml/2006/main">
+  <p:cSld name="Slide 5">
+    <p:spTree>
+      <p:nvGrpSpPr>
+        <p:cNvPr id="1" name=""/>
+        <p:cNvGrpSpPr/>
+        <p:nvPr/>
+      </p:nvGrpSpPr>
+      <p:grpSpPr>
+        <a:xfrm>
+          <a:off x="0" y="0"/>
+          <a:ext cx="0" cy="0"/>
+          <a:chOff x="0" y="0"/>
+          <a:chExt cx="0" cy="0"/>
+        </a:xfrm>
+      </p:grpSpPr>
+      <p:sp>
+        <p:nvSpPr>
+          <p:cNvPr id="2" name="Text 0"/>
+          <p:cNvSpPr/>
+          <p:nvPr/>
+        </p:nvSpPr>
+        <p:spPr>
+          <a:xfrm>
+            <a:off x="457200" y="713232"/>
+            <a:ext cx="11368735" cy="274320"/>
+          </a:xfrm>
+          <a:prstGeom prst="rect">
+            <a:avLst/>
+          </a:prstGeom>
+          <a:noFill/>
+          <a:ln/>
+        </p:spPr>
+        <p:txBody>
+          <a:bodyPr wrap="square" lIns="0" tIns="0" rIns="0" bIns="0" rtlCol="0" anchor="ctr"/>
+          <a:lstStyle/>
+          <a:p>
+            <a:pPr algn="r" indent="0" marL="0">
+              <a:buNone/>
+            </a:pPr>
+            <a:r>
+              <a:rPr lang="en-US" sz="1400" b="1" dirty="0">
+                <a:solidFill>
+                  <a:srgbClr val="1C3F6E"/>
+                </a:solidFill>
+                <a:latin typeface="Calibri" pitchFamily="34" charset="0"/>
+                <a:ea typeface="Calibri" pitchFamily="34" charset="-122"/>
+                <a:cs typeface="Calibri" pitchFamily="34" charset="-120"/>
+              </a:rPr>
+              <a:t>HOMEWORK CORRECTION</a:t>
+            </a:r>
+            <a:endParaRPr lang="en-US" sz="1400" dirty="0"/>
+          </a:p>
+        </p:txBody>
+      </p:sp>
+      <p:pic>
+        <p:nvPicPr>
+          <p:cNvPr id="3" name="Image 0" descr="/home/claude/f4/img/minesec_sheet.png">    </p:cNvPr>
+          <p:cNvPicPr>
+            <a:picLocks noChangeAspect="1"/>
+          </p:cNvPicPr>
+          <p:nvPr/>
+        </p:nvPicPr>
+        <p:blipFill>
+          <a:blip r:embed="rId1"/>
+          <a:stretch>
+            <a:fillRect/>
+          </a:stretch>
+        </p:blipFill>
+        <p:spPr>
+          <a:xfrm>
+            <a:off x="0" y="658368"/>
+            <a:ext cx="5120640" cy="5833872"/>
+          </a:xfrm>
+          <a:prstGeom prst="rect">
+            <a:avLst/>
+          </a:prstGeom>
+        </p:spPr>
+      </p:pic>
+      <p:sp>
+        <p:nvSpPr>
+          <p:cNvPr id="4" name="Text 1"/>
+          <p:cNvSpPr/>
+          <p:nvPr/>
+        </p:nvSpPr>
+        <p:spPr>
+          <a:xfrm>
+            <a:off x="5349240" y="1005840"/>
+            <a:ext cx="6522415" cy="731520"/>
+          </a:xfrm>
+          <a:prstGeom prst="rect">
+            <a:avLst/>
+          </a:prstGeom>
+          <a:noFill/>
+          <a:ln/>
+        </p:spPr>
+        <p:txBody>
+          <a:bodyPr wrap="square" lIns="0" tIns="0" rIns="0" bIns="0" rtlCol="0" anchor="ctr">
+            <a:normAutofit/>
+          </a:bodyPr>
+          <a:lstStyle/>
+          <a:p>
+            <a:pPr algn="ctr" indent="0" marL="0">
+              <a:buNone/>
+            </a:pPr>
+            <a:r>
+              <a:rPr lang="en-US" sz="3600" b="1" dirty="0">
+                <a:solidFill>
+                  <a:srgbClr val="990011"/>
+                </a:solidFill>
+                <a:latin typeface="Times New Roman" pitchFamily="34" charset="0"/>
+                <a:ea typeface="Times New Roman" pitchFamily="34" charset="-122"/>
+                <a:cs typeface="Times New Roman" pitchFamily="34" charset="-120"/>
+              </a:rPr>
+              <a:t>Correction: Possible Answer</a:t>
+            </a:r>
+            <a:endParaRPr lang="en-US" sz="3600" dirty="0"/>
+          </a:p>
+        </p:txBody>
+      </p:sp>
+      <p:sp>
+        <p:nvSpPr>
+          <p:cNvPr id="5" name="Text 2"/>
+          <p:cNvSpPr/>
+          <p:nvPr/>
+        </p:nvSpPr>
+        <p:spPr>
+          <a:xfrm>
+            <a:off x="5349240" y="1783080"/>
+            <a:ext cx="6522415" cy="4663440"/>
+          </a:xfrm>
+          <a:prstGeom prst="rect">
+            <a:avLst/>
+          </a:prstGeom>
+          <a:noFill/>
+          <a:ln/>
+        </p:spPr>
+        <p:txBody>
+          <a:bodyPr wrap="square" lIns="0" tIns="0" rIns="0" bIns="0" rtlCol="0" anchor="t"/>
+          <a:lstStyle/>
+          <a:p>
+            <a:pPr algn="l" indent="0" marL="0">
+              <a:spcAft>
+                <a:spcPts val="800"/>
+              </a:spcAft>
+              <a:buNone/>
+            </a:pPr>
+            <a:r>
+              <a:rPr lang="en-US" sz="4000" dirty="0">
+                <a:solidFill>
+                  <a:srgbClr val="111111"/>
+                </a:solidFill>
+                <a:latin typeface="Times New Roman" pitchFamily="34" charset="0"/>
+                <a:ea typeface="Times New Roman" pitchFamily="34" charset="-122"/>
+                <a:cs typeface="Times New Roman" pitchFamily="34" charset="-120"/>
+              </a:rPr>
+              <a:t>Answers vary. Example: lack of fertiliser (solution: cooperative purchase) and cattle destroying crops (solution: grazing corridors and dialogue).</a:t>
+            </a:r>
+            <a:endParaRPr lang="en-US" sz="4000" dirty="0"/>
+          </a:p>
+        </p:txBody>
+      </p:sp>
+      <p:sp>
+        <p:nvSpPr>
+          <p:cNvPr id="25" name="Slide Number Placeholder 0"/>
+          <p:cNvSpPr>
+            <a:spLocks noGrp="1"/>
+          </p:cNvSpPr>
+          <p:nvPr>
+            <p:ph type="sldNum" sz="quarter" idx="4294967295"/>
+          </p:nvPr>
+        </p:nvSpPr>
+        <p:spPr>
+          <a:xfrm>
+            <a:off x="27432" y="91440"/>
+            <a:ext cx="585216" cy="475488"/>
+          </a:xfrm>
+          <a:prstGeom prst="rect">
+            <a:avLst/>
+          </a:prstGeom>
+          <a:extLst>
+            <a:ext uri="{C572A759-6A51-4108-AA02-DFA0A04FC94B}">
+              <ma14:wrappingTextBoxFlag xmlns:ma14="http://schemas.microsoft.com/office/mac/drawingml/2011/main" val="0"/>
+            </a:ext>
+          </a:extLst>
+        </p:spPr>
+        <p:txBody>
+          <a:bodyPr/>
+          <a:lstStyle>
+            <a:lvl1pPr>
+              <a:defRPr sz="2000">
+                <a:solidFill>
+                  <a:srgbClr val="FFFFFF"/>
+                </a:solidFill>
+                <a:latin typeface="Calibri"/>
+                <a:ea typeface="Calibri"/>
+                <a:cs typeface="Calibri"/>
+              </a:defRPr>
+            </a:lvl1pPr>
+          </a:lstStyle>
+          <a:p>
+            <a:pPr algn="ctr"/>
+            <a:fld id="{F7021451-1387-4CA6-816F-3879F97B5CBC}" type="slidenum">
+              <a:rPr b="1" lang="en-US"/>
+              <a:t>5</a:t>
+            </a:fld>
+            <a:endParaRPr lang="en-US"/>
+          </a:p>
+        </p:txBody>
+      </p:sp>
+    </p:spTree>
+  </p:cSld>
+  <p:clrMapOvr>
+    <a:masterClrMapping/>
+  </p:clrMapOvr>
+</p:sld>
+</file>
+
+<file path=ppt/slides/slide50.xml><?xml version="1.0" encoding="utf-8"?>
+<p:sld xmlns:a="http://schemas.openxmlformats.org/drawingml/2006/main" xmlns:r="http://schemas.openxmlformats.org/officeDocument/2006/relationships" xmlns:p="http://schemas.openxmlformats.org/presentationml/2006/main">
+  <p:cSld name="Slide 50">
+    <p:spTree>
+      <p:nvGrpSpPr>
+        <p:cNvPr id="1" name=""/>
+        <p:cNvGrpSpPr/>
+        <p:nvPr/>
+      </p:nvGrpSpPr>
+      <p:grpSpPr>
+        <a:xfrm>
+          <a:off x="0" y="0"/>
+          <a:ext cx="0" cy="0"/>
+          <a:chOff x="0" y="0"/>
+          <a:chExt cx="0" cy="0"/>
+        </a:xfrm>
+      </p:grpSpPr>
+      <p:sp>
+        <p:nvSpPr>
+          <p:cNvPr id="2" name="Text 0"/>
+          <p:cNvSpPr/>
+          <p:nvPr/>
+        </p:nvSpPr>
+        <p:spPr>
+          <a:xfrm>
+            <a:off x="457200" y="713232"/>
+            <a:ext cx="11368735" cy="274320"/>
+          </a:xfrm>
+          <a:prstGeom prst="rect">
+            <a:avLst/>
+          </a:prstGeom>
+          <a:noFill/>
+          <a:ln/>
+        </p:spPr>
+        <p:txBody>
+          <a:bodyPr wrap="square" lIns="0" tIns="0" rIns="0" bIns="0" rtlCol="0" anchor="ctr"/>
+          <a:lstStyle/>
+          <a:p>
+            <a:pPr algn="r" indent="0" marL="0">
+              <a:buNone/>
+            </a:pPr>
+            <a:r>
+              <a:rPr lang="en-US" sz="1400" b="1" dirty="0">
+                <a:solidFill>
+                  <a:srgbClr val="1C3F6E"/>
+                </a:solidFill>
+                <a:latin typeface="Calibri" pitchFamily="34" charset="0"/>
+                <a:ea typeface="Calibri" pitchFamily="34" charset="-122"/>
+                <a:cs typeface="Calibri" pitchFamily="34" charset="-120"/>
+              </a:rPr>
               <a:t>BILINGUAL GAME</a:t>
             </a:r>
             <a:endParaRPr lang="en-US" sz="1400" dirty="0"/>
@@ -17307,7 +18062,7 @@
       </p:sp>
       <p:graphicFrame>
         <p:nvGraphicFramePr>
-          <p:cNvPr id="50" name="Table 0"/>
+          <p:cNvPr id="51" name="Table 0"/>
           <p:cNvGraphicFramePr>
             <a:graphicFrameLocks noGrp="1"/>
           </p:cNvGraphicFramePr>
@@ -18343,7 +19098,7 @@
             <a:pPr algn="ctr"/>
             <a:fld id="{F7021451-1387-4CA6-816F-3879F97B5CBC}" type="slidenum">
               <a:rPr b="1" lang="en-US"/>
-              <a:t>49</a:t>
+              <a:t>50</a:t>
             </a:fld>
             <a:endParaRPr lang="en-US"/>
           </a:p>
@@ -18357,9 +19112,9 @@
 </p:sld>
 </file>
 
-<file path=ppt/slides/slide5.xml><?xml version="1.0" encoding="utf-8"?>
+<file path=ppt/slides/slide51.xml><?xml version="1.0" encoding="utf-8"?>
 <p:sld xmlns:a="http://schemas.openxmlformats.org/drawingml/2006/main" xmlns:r="http://schemas.openxmlformats.org/officeDocument/2006/relationships" xmlns:p="http://schemas.openxmlformats.org/presentationml/2006/main">
-  <p:cSld name="Slide 5">
+  <p:cSld name="Slide 51">
     <p:spTree>
       <p:nvGrpSpPr>
         <p:cNvPr id="1" name=""/>
@@ -18407,225 +19162,6 @@
                 <a:ea typeface="Calibri" pitchFamily="34" charset="-122"/>
                 <a:cs typeface="Calibri" pitchFamily="34" charset="-120"/>
               </a:rPr>
-              <a:t>HOMEWORK CORRECTION</a:t>
-            </a:r>
-            <a:endParaRPr lang="en-US" sz="1400" dirty="0"/>
-          </a:p>
-        </p:txBody>
-      </p:sp>
-      <p:pic>
-        <p:nvPicPr>
-          <p:cNvPr id="3" name="Image 0" descr="/home/claude/f4/img/minesec_sheet.png">    </p:cNvPr>
-          <p:cNvPicPr>
-            <a:picLocks noChangeAspect="1"/>
-          </p:cNvPicPr>
-          <p:nvPr/>
-        </p:nvPicPr>
-        <p:blipFill>
-          <a:blip r:embed="rId1"/>
-          <a:stretch>
-            <a:fillRect/>
-          </a:stretch>
-        </p:blipFill>
-        <p:spPr>
-          <a:xfrm>
-            <a:off x="0" y="658368"/>
-            <a:ext cx="5120640" cy="5833872"/>
-          </a:xfrm>
-          <a:prstGeom prst="rect">
-            <a:avLst/>
-          </a:prstGeom>
-        </p:spPr>
-      </p:pic>
-      <p:sp>
-        <p:nvSpPr>
-          <p:cNvPr id="4" name="Text 1"/>
-          <p:cNvSpPr/>
-          <p:nvPr/>
-        </p:nvSpPr>
-        <p:spPr>
-          <a:xfrm>
-            <a:off x="5349240" y="1005840"/>
-            <a:ext cx="6522415" cy="731520"/>
-          </a:xfrm>
-          <a:prstGeom prst="rect">
-            <a:avLst/>
-          </a:prstGeom>
-          <a:noFill/>
-          <a:ln/>
-        </p:spPr>
-        <p:txBody>
-          <a:bodyPr wrap="square" lIns="0" tIns="0" rIns="0" bIns="0" rtlCol="0" anchor="ctr">
-            <a:normAutofit/>
-          </a:bodyPr>
-          <a:lstStyle/>
-          <a:p>
-            <a:pPr algn="ctr" indent="0" marL="0">
-              <a:buNone/>
-            </a:pPr>
-            <a:r>
-              <a:rPr lang="en-US" sz="3600" b="1" dirty="0">
-                <a:solidFill>
-                  <a:srgbClr val="990011"/>
-                </a:solidFill>
-                <a:latin typeface="Times New Roman" pitchFamily="34" charset="0"/>
-                <a:ea typeface="Times New Roman" pitchFamily="34" charset="-122"/>
-                <a:cs typeface="Times New Roman" pitchFamily="34" charset="-120"/>
-              </a:rPr>
-              <a:t>Correction: Possible Answer</a:t>
-            </a:r>
-            <a:endParaRPr lang="en-US" sz="3600" dirty="0"/>
-          </a:p>
-        </p:txBody>
-      </p:sp>
-      <p:sp>
-        <p:nvSpPr>
-          <p:cNvPr id="5" name="Text 2"/>
-          <p:cNvSpPr/>
-          <p:nvPr/>
-        </p:nvSpPr>
-        <p:spPr>
-          <a:xfrm>
-            <a:off x="5349240" y="1783080"/>
-            <a:ext cx="6522415" cy="4663440"/>
-          </a:xfrm>
-          <a:prstGeom prst="rect">
-            <a:avLst/>
-          </a:prstGeom>
-          <a:noFill/>
-          <a:ln/>
-        </p:spPr>
-        <p:txBody>
-          <a:bodyPr wrap="square" lIns="0" tIns="0" rIns="0" bIns="0" rtlCol="0" anchor="t"/>
-          <a:lstStyle/>
-          <a:p>
-            <a:pPr algn="l" indent="0" marL="0">
-              <a:spcAft>
-                <a:spcPts val="800"/>
-              </a:spcAft>
-              <a:buNone/>
-            </a:pPr>
-            <a:r>
-              <a:rPr lang="en-US" sz="4000" dirty="0">
-                <a:solidFill>
-                  <a:srgbClr val="111111"/>
-                </a:solidFill>
-                <a:latin typeface="Times New Roman" pitchFamily="34" charset="0"/>
-                <a:ea typeface="Times New Roman" pitchFamily="34" charset="-122"/>
-                <a:cs typeface="Times New Roman" pitchFamily="34" charset="-120"/>
-              </a:rPr>
-              <a:t>Answers vary. Example: lack of fertiliser (solution: cooperative purchase) and cattle destroying crops (solution: grazing corridors and dialogue).</a:t>
-            </a:r>
-            <a:endParaRPr lang="en-US" sz="4000" dirty="0"/>
-          </a:p>
-        </p:txBody>
-      </p:sp>
-      <p:sp>
-        <p:nvSpPr>
-          <p:cNvPr id="25" name="Slide Number Placeholder 0"/>
-          <p:cNvSpPr>
-            <a:spLocks noGrp="1"/>
-          </p:cNvSpPr>
-          <p:nvPr>
-            <p:ph type="sldNum" sz="quarter" idx="4294967295"/>
-          </p:nvPr>
-        </p:nvSpPr>
-        <p:spPr>
-          <a:xfrm>
-            <a:off x="27432" y="91440"/>
-            <a:ext cx="585216" cy="475488"/>
-          </a:xfrm>
-          <a:prstGeom prst="rect">
-            <a:avLst/>
-          </a:prstGeom>
-          <a:extLst>
-            <a:ext uri="{C572A759-6A51-4108-AA02-DFA0A04FC94B}">
-              <ma14:wrappingTextBoxFlag xmlns:ma14="http://schemas.microsoft.com/office/mac/drawingml/2011/main" val="0"/>
-            </a:ext>
-          </a:extLst>
-        </p:spPr>
-        <p:txBody>
-          <a:bodyPr/>
-          <a:lstStyle>
-            <a:lvl1pPr>
-              <a:defRPr sz="2000">
-                <a:solidFill>
-                  <a:srgbClr val="FFFFFF"/>
-                </a:solidFill>
-                <a:latin typeface="Calibri"/>
-                <a:ea typeface="Calibri"/>
-                <a:cs typeface="Calibri"/>
-              </a:defRPr>
-            </a:lvl1pPr>
-          </a:lstStyle>
-          <a:p>
-            <a:pPr algn="ctr"/>
-            <a:fld id="{F7021451-1387-4CA6-816F-3879F97B5CBC}" type="slidenum">
-              <a:rPr b="1" lang="en-US"/>
-              <a:t>5</a:t>
-            </a:fld>
-            <a:endParaRPr lang="en-US"/>
-          </a:p>
-        </p:txBody>
-      </p:sp>
-    </p:spTree>
-  </p:cSld>
-  <p:clrMapOvr>
-    <a:masterClrMapping/>
-  </p:clrMapOvr>
-</p:sld>
-</file>
-
-<file path=ppt/slides/slide50.xml><?xml version="1.0" encoding="utf-8"?>
-<p:sld xmlns:a="http://schemas.openxmlformats.org/drawingml/2006/main" xmlns:r="http://schemas.openxmlformats.org/officeDocument/2006/relationships" xmlns:p="http://schemas.openxmlformats.org/presentationml/2006/main">
-  <p:cSld name="Slide 50">
-    <p:spTree>
-      <p:nvGrpSpPr>
-        <p:cNvPr id="1" name=""/>
-        <p:cNvGrpSpPr/>
-        <p:nvPr/>
-      </p:nvGrpSpPr>
-      <p:grpSpPr>
-        <a:xfrm>
-          <a:off x="0" y="0"/>
-          <a:ext cx="0" cy="0"/>
-          <a:chOff x="0" y="0"/>
-          <a:chExt cx="0" cy="0"/>
-        </a:xfrm>
-      </p:grpSpPr>
-      <p:sp>
-        <p:nvSpPr>
-          <p:cNvPr id="2" name="Text 0"/>
-          <p:cNvSpPr/>
-          <p:nvPr/>
-        </p:nvSpPr>
-        <p:spPr>
-          <a:xfrm>
-            <a:off x="457200" y="713232"/>
-            <a:ext cx="11368735" cy="274320"/>
-          </a:xfrm>
-          <a:prstGeom prst="rect">
-            <a:avLst/>
-          </a:prstGeom>
-          <a:noFill/>
-          <a:ln/>
-        </p:spPr>
-        <p:txBody>
-          <a:bodyPr wrap="square" lIns="0" tIns="0" rIns="0" bIns="0" rtlCol="0" anchor="ctr"/>
-          <a:lstStyle/>
-          <a:p>
-            <a:pPr algn="r" indent="0" marL="0">
-              <a:buNone/>
-            </a:pPr>
-            <a:r>
-              <a:rPr lang="en-US" sz="1400" b="1" dirty="0">
-                <a:solidFill>
-                  <a:srgbClr val="1C3F6E"/>
-                </a:solidFill>
-                <a:latin typeface="Calibri" pitchFamily="34" charset="0"/>
-                <a:ea typeface="Calibri" pitchFamily="34" charset="-122"/>
-                <a:cs typeface="Calibri" pitchFamily="34" charset="-120"/>
-              </a:rPr>
               <a:t>LOGBOOK</a:t>
             </a:r>
             <a:endParaRPr lang="en-US" sz="1400" dirty="0"/>
@@ -18673,7 +19209,7 @@
       </p:sp>
       <p:graphicFrame>
         <p:nvGraphicFramePr>
-          <p:cNvPr id="51" name="Table 0"/>
+          <p:cNvPr id="52" name="Table 0"/>
           <p:cNvGraphicFramePr>
             <a:graphicFrameLocks noGrp="1"/>
           </p:cNvGraphicFramePr>
@@ -19295,7 +19831,7 @@
             <a:pPr algn="ctr"/>
             <a:fld id="{F7021451-1387-4CA6-816F-3879F97B5CBC}" type="slidenum">
               <a:rPr b="1" lang="en-US"/>
-              <a:t>50</a:t>
+              <a:t>51</a:t>
             </a:fld>
             <a:endParaRPr lang="en-US"/>
           </a:p>
@@ -19309,9 +19845,9 @@
 </p:sld>
 </file>
 
-<file path=ppt/slides/slide51.xml><?xml version="1.0" encoding="utf-8"?>
+<file path=ppt/slides/slide52.xml><?xml version="1.0" encoding="utf-8"?>
 <p:sld xmlns:a="http://schemas.openxmlformats.org/drawingml/2006/main" xmlns:r="http://schemas.openxmlformats.org/officeDocument/2006/relationships" xmlns:p="http://schemas.openxmlformats.org/presentationml/2006/main">
-  <p:cSld name="Slide 51">
+  <p:cSld name="Slide 52">
     <p:spTree>
       <p:nvGrpSpPr>
         <p:cNvPr id="1" name=""/>
@@ -19406,7 +19942,7 @@
       </p:sp>
       <p:graphicFrame>
         <p:nvGraphicFramePr>
-          <p:cNvPr id="52" name="Table 0"/>
+          <p:cNvPr id="53" name="Table 0"/>
           <p:cNvGraphicFramePr>
             <a:graphicFrameLocks noGrp="1"/>
           </p:cNvGraphicFramePr>
@@ -19516,7 +20052,7 @@
                           <a:ea typeface="Calibri" pitchFamily="34" charset="-122"/>
                           <a:cs typeface="Calibri" pitchFamily="34" charset="-120"/>
                         </a:rPr>
-                        <a:t>DEFINITIONS; Global Stock and Distribution; Forest Products and their Importance; Conservation of Forest Resources.</a:t>
+                        <a:t>DEFINITIONS; Global Stock and Distribution; Forest Products; Importance; Conservation of Forest Resources.</a:t>
                       </a:r>
                       <a:endParaRPr lang="en-US" sz="1600" dirty="0">
                         <a:latin typeface="Calibri" charset="0"/>
@@ -20166,331 +20702,6 @@
             <a:pPr algn="ctr"/>
             <a:fld id="{F7021451-1387-4CA6-816F-3879F97B5CBC}" type="slidenum">
               <a:rPr b="1" lang="en-US"/>
-              <a:t>51</a:t>
-            </a:fld>
-            <a:endParaRPr lang="en-US"/>
-          </a:p>
-        </p:txBody>
-      </p:sp>
-    </p:spTree>
-  </p:cSld>
-  <p:clrMapOvr>
-    <a:masterClrMapping/>
-  </p:clrMapOvr>
-</p:sld>
-</file>
-
-<file path=ppt/slides/slide52.xml><?xml version="1.0" encoding="utf-8"?>
-<p:sld xmlns:a="http://schemas.openxmlformats.org/drawingml/2006/main" xmlns:r="http://schemas.openxmlformats.org/officeDocument/2006/relationships" xmlns:p="http://schemas.openxmlformats.org/presentationml/2006/main">
-  <p:cSld name="Slide 52">
-    <p:spTree>
-      <p:nvGrpSpPr>
-        <p:cNvPr id="1" name=""/>
-        <p:cNvGrpSpPr/>
-        <p:nvPr/>
-      </p:nvGrpSpPr>
-      <p:grpSpPr>
-        <a:xfrm>
-          <a:off x="0" y="0"/>
-          <a:ext cx="0" cy="0"/>
-          <a:chOff x="0" y="0"/>
-          <a:chExt cx="0" cy="0"/>
-        </a:xfrm>
-      </p:grpSpPr>
-      <p:sp>
-        <p:nvSpPr>
-          <p:cNvPr id="2" name="Text 0"/>
-          <p:cNvSpPr/>
-          <p:nvPr/>
-        </p:nvSpPr>
-        <p:spPr>
-          <a:xfrm>
-            <a:off x="457200" y="713232"/>
-            <a:ext cx="11368735" cy="274320"/>
-          </a:xfrm>
-          <a:prstGeom prst="rect">
-            <a:avLst/>
-          </a:prstGeom>
-          <a:noFill/>
-          <a:ln/>
-        </p:spPr>
-        <p:txBody>
-          <a:bodyPr wrap="square" lIns="0" tIns="0" rIns="0" bIns="0" rtlCol="0" anchor="ctr"/>
-          <a:lstStyle/>
-          <a:p>
-            <a:pPr algn="r" indent="0" marL="0">
-              <a:buNone/>
-            </a:pPr>
-            <a:r>
-              <a:rPr lang="en-US" sz="1400" b="1" dirty="0">
-                <a:solidFill>
-                  <a:srgbClr val="1C3F6E"/>
-                </a:solidFill>
-                <a:latin typeface="Calibri" pitchFamily="34" charset="0"/>
-                <a:ea typeface="Calibri" pitchFamily="34" charset="-122"/>
-                <a:cs typeface="Calibri" pitchFamily="34" charset="-120"/>
-              </a:rPr>
-              <a:t>TEACHER'S NOTE</a:t>
-            </a:r>
-            <a:endParaRPr lang="en-US" sz="1400" dirty="0"/>
-          </a:p>
-        </p:txBody>
-      </p:sp>
-      <p:pic>
-        <p:nvPicPr>
-          <p:cNvPr id="3" name="Image 0" descr="/home/claude/f4/img/minesec_sheet.png">    </p:cNvPr>
-          <p:cNvPicPr>
-            <a:picLocks noChangeAspect="1"/>
-          </p:cNvPicPr>
-          <p:nvPr/>
-        </p:nvPicPr>
-        <p:blipFill>
-          <a:blip r:embed="rId1"/>
-          <a:stretch>
-            <a:fillRect/>
-          </a:stretch>
-        </p:blipFill>
-        <p:spPr>
-          <a:xfrm>
-            <a:off x="0" y="658368"/>
-            <a:ext cx="5120640" cy="5833872"/>
-          </a:xfrm>
-          <a:prstGeom prst="rect">
-            <a:avLst/>
-          </a:prstGeom>
-        </p:spPr>
-      </p:pic>
-      <p:sp>
-        <p:nvSpPr>
-          <p:cNvPr id="4" name="Text 1"/>
-          <p:cNvSpPr/>
-          <p:nvPr/>
-        </p:nvSpPr>
-        <p:spPr>
-          <a:xfrm>
-            <a:off x="5349240" y="1005840"/>
-            <a:ext cx="6522415" cy="731520"/>
-          </a:xfrm>
-          <a:prstGeom prst="rect">
-            <a:avLst/>
-          </a:prstGeom>
-          <a:noFill/>
-          <a:ln/>
-        </p:spPr>
-        <p:txBody>
-          <a:bodyPr wrap="square" lIns="0" tIns="0" rIns="0" bIns="0" rtlCol="0" anchor="ctr">
-            <a:normAutofit/>
-          </a:bodyPr>
-          <a:lstStyle/>
-          <a:p>
-            <a:pPr algn="ctr" indent="0" marL="0">
-              <a:buNone/>
-            </a:pPr>
-            <a:r>
-              <a:rPr lang="en-US" sz="3600" b="1" dirty="0">
-                <a:solidFill>
-                  <a:srgbClr val="990011"/>
-                </a:solidFill>
-                <a:latin typeface="Times New Roman" pitchFamily="34" charset="0"/>
-                <a:ea typeface="Times New Roman" pitchFamily="34" charset="-122"/>
-                <a:cs typeface="Times New Roman" pitchFamily="34" charset="-120"/>
-              </a:rPr>
-              <a:t>Teacher's Note</a:t>
-            </a:r>
-            <a:endParaRPr lang="en-US" sz="3600" dirty="0"/>
-          </a:p>
-        </p:txBody>
-      </p:sp>
-      <p:sp>
-        <p:nvSpPr>
-          <p:cNvPr id="5" name="Text 2"/>
-          <p:cNvSpPr/>
-          <p:nvPr/>
-        </p:nvSpPr>
-        <p:spPr>
-          <a:xfrm>
-            <a:off x="5349240" y="1783080"/>
-            <a:ext cx="6522415" cy="4663440"/>
-          </a:xfrm>
-          <a:prstGeom prst="rect">
-            <a:avLst/>
-          </a:prstGeom>
-          <a:noFill/>
-          <a:ln/>
-        </p:spPr>
-        <p:txBody>
-          <a:bodyPr wrap="square" lIns="0" tIns="0" rIns="0" bIns="0" rtlCol="0" anchor="t"/>
-          <a:lstStyle/>
-          <a:p>
-            <a:pPr algn="l" marL="342900" indent="-342900">
-              <a:spcAft>
-                <a:spcPts val="800"/>
-              </a:spcAft>
-              <a:buSzPct val="100000"/>
-              <a:buChar char="•"/>
-            </a:pPr>
-            <a:r>
-              <a:rPr lang="en-US" sz="2000" dirty="0">
-                <a:solidFill>
-                  <a:srgbClr val="111111"/>
-                </a:solidFill>
-                <a:latin typeface="Calibri" pitchFamily="34" charset="0"/>
-                <a:ea typeface="Calibri" pitchFamily="34" charset="-122"/>
-                <a:cs typeface="Calibri" pitchFamily="34" charset="-120"/>
-              </a:rPr>
-              <a:t>Timing: Homework correction, plan, objectives 8 min | Recall, situation, action 10 min | 5 activities 30 min | Board summary (copying) 30 min | Evaluation, remediation 10 min | Homework, next lesson 5 min | Logbook 7 min</a:t>
-            </a:r>
-            <a:endParaRPr lang="en-US" sz="2000" dirty="0"/>
-          </a:p>
-          <a:p>
-            <a:pPr algn="l" marL="342900" indent="-342900">
-              <a:spcAft>
-                <a:spcPts val="800"/>
-              </a:spcAft>
-              <a:buSzPct val="100000"/>
-              <a:buChar char="•"/>
-            </a:pPr>
-            <a:r>
-              <a:rPr lang="en-US" sz="2000" dirty="0">
-                <a:solidFill>
-                  <a:srgbClr val="111111"/>
-                </a:solidFill>
-                <a:latin typeface="Calibri" pitchFamily="34" charset="0"/>
-                <a:ea typeface="Calibri" pitchFamily="34" charset="-122"/>
-                <a:cs typeface="Calibri" pitchFamily="34" charset="-120"/>
-              </a:rPr>
-              <a:t>Without the projector (Activity 1): use the atlas.</a:t>
-            </a:r>
-            <a:endParaRPr lang="en-US" sz="2000" dirty="0"/>
-          </a:p>
-          <a:p>
-            <a:pPr algn="l" marL="342900" indent="-342900">
-              <a:spcAft>
-                <a:spcPts val="800"/>
-              </a:spcAft>
-              <a:buSzPct val="100000"/>
-              <a:buChar char="•"/>
-            </a:pPr>
-            <a:r>
-              <a:rPr lang="en-US" sz="2000" dirty="0">
-                <a:solidFill>
-                  <a:srgbClr val="111111"/>
-                </a:solidFill>
-                <a:latin typeface="Calibri" pitchFamily="34" charset="0"/>
-                <a:ea typeface="Calibri" pitchFamily="34" charset="-122"/>
-                <a:cs typeface="Calibri" pitchFamily="34" charset="-120"/>
-              </a:rPr>
-              <a:t>Without the projector (Activity 2): list products.</a:t>
-            </a:r>
-            <a:endParaRPr lang="en-US" sz="2000" dirty="0"/>
-          </a:p>
-          <a:p>
-            <a:pPr algn="l" marL="342900" indent="-342900">
-              <a:spcAft>
-                <a:spcPts val="800"/>
-              </a:spcAft>
-              <a:buSzPct val="100000"/>
-              <a:buChar char="•"/>
-            </a:pPr>
-            <a:r>
-              <a:rPr lang="en-US" sz="2000" dirty="0">
-                <a:solidFill>
-                  <a:srgbClr val="111111"/>
-                </a:solidFill>
-                <a:latin typeface="Calibri" pitchFamily="34" charset="0"/>
-                <a:ea typeface="Calibri" pitchFamily="34" charset="-122"/>
-                <a:cs typeface="Calibri" pitchFamily="34" charset="-120"/>
-              </a:rPr>
-              <a:t>Without the projector (Activity 3): discuss.</a:t>
-            </a:r>
-            <a:endParaRPr lang="en-US" sz="2000" dirty="0"/>
-          </a:p>
-          <a:p>
-            <a:pPr algn="l" marL="342900" indent="-342900">
-              <a:spcAft>
-                <a:spcPts val="800"/>
-              </a:spcAft>
-              <a:buSzPct val="100000"/>
-              <a:buChar char="•"/>
-            </a:pPr>
-            <a:r>
-              <a:rPr lang="en-US" sz="2000" dirty="0">
-                <a:solidFill>
-                  <a:srgbClr val="111111"/>
-                </a:solidFill>
-                <a:latin typeface="Calibri" pitchFamily="34" charset="0"/>
-                <a:ea typeface="Calibri" pitchFamily="34" charset="-122"/>
-                <a:cs typeface="Calibri" pitchFamily="34" charset="-120"/>
-              </a:rPr>
-              <a:t>Without the projector (Activity 4): discuss.</a:t>
-            </a:r>
-            <a:endParaRPr lang="en-US" sz="2000" dirty="0"/>
-          </a:p>
-          <a:p>
-            <a:pPr algn="l" marL="342900" indent="-342900">
-              <a:spcAft>
-                <a:spcPts val="800"/>
-              </a:spcAft>
-              <a:buSzPct val="100000"/>
-              <a:buChar char="•"/>
-            </a:pPr>
-            <a:r>
-              <a:rPr lang="en-US" sz="2000" dirty="0">
-                <a:solidFill>
-                  <a:srgbClr val="111111"/>
-                </a:solidFill>
-                <a:latin typeface="Calibri" pitchFamily="34" charset="0"/>
-                <a:ea typeface="Calibri" pitchFamily="34" charset="-122"/>
-                <a:cs typeface="Calibri" pitchFamily="34" charset="-120"/>
-              </a:rPr>
-              <a:t>Without the projector (Activity 5): list methods.</a:t>
-            </a:r>
-            <a:endParaRPr lang="en-US" sz="2000" dirty="0"/>
-          </a:p>
-        </p:txBody>
-      </p:sp>
-      <p:sp>
-        <p:nvSpPr>
-          <p:cNvPr id="25" name="Slide Number Placeholder 0"/>
-          <p:cNvSpPr>
-            <a:spLocks noGrp="1"/>
-          </p:cNvSpPr>
-          <p:nvPr>
-            <p:ph type="sldNum" sz="quarter" idx="4294967295"/>
-          </p:nvPr>
-        </p:nvSpPr>
-        <p:spPr>
-          <a:xfrm>
-            <a:off x="27432" y="91440"/>
-            <a:ext cx="585216" cy="475488"/>
-          </a:xfrm>
-          <a:prstGeom prst="rect">
-            <a:avLst/>
-          </a:prstGeom>
-          <a:extLst>
-            <a:ext uri="{C572A759-6A51-4108-AA02-DFA0A04FC94B}">
-              <ma14:wrappingTextBoxFlag xmlns:ma14="http://schemas.microsoft.com/office/mac/drawingml/2011/main" val="0"/>
-            </a:ext>
-          </a:extLst>
-        </p:spPr>
-        <p:txBody>
-          <a:bodyPr/>
-          <a:lstStyle>
-            <a:lvl1pPr>
-              <a:defRPr sz="2000">
-                <a:solidFill>
-                  <a:srgbClr val="FFFFFF"/>
-                </a:solidFill>
-                <a:latin typeface="Calibri"/>
-                <a:ea typeface="Calibri"/>
-                <a:cs typeface="Calibri"/>
-              </a:defRPr>
-            </a:lvl1pPr>
-          </a:lstStyle>
-          <a:p>
-            <a:pPr algn="ctr"/>
-            <a:fld id="{F7021451-1387-4CA6-816F-3879F97B5CBC}" type="slidenum">
-              <a:rPr b="1" lang="en-US"/>
               <a:t>52</a:t>
             </a:fld>
             <a:endParaRPr lang="en-US"/>
@@ -20555,7 +20766,7 @@
                 <a:ea typeface="Calibri" pitchFamily="34" charset="-122"/>
                 <a:cs typeface="Calibri" pitchFamily="34" charset="-120"/>
               </a:rPr>
-              <a:t>REFERENCES</a:t>
+              <a:t>TEACHER'S NOTE</a:t>
             </a:r>
             <a:endParaRPr lang="en-US" sz="1400" dirty="0"/>
           </a:p>
@@ -20578,7 +20789,7 @@
         <p:spPr>
           <a:xfrm>
             <a:off x="0" y="658368"/>
-            <a:ext cx="2468880" cy="5833872"/>
+            <a:ext cx="5120640" cy="5833872"/>
           </a:xfrm>
           <a:prstGeom prst="rect">
             <a:avLst/>
@@ -20593,8 +20804,8 @@
         </p:nvSpPr>
         <p:spPr>
           <a:xfrm>
-            <a:off x="2697480" y="1005840"/>
-            <a:ext cx="9174175" cy="731520"/>
+            <a:off x="5349240" y="1005840"/>
+            <a:ext cx="6522415" cy="731520"/>
           </a:xfrm>
           <a:prstGeom prst="rect">
             <a:avLst/>
@@ -20620,7 +20831,7 @@
                 <a:ea typeface="Times New Roman" pitchFamily="34" charset="-122"/>
                 <a:cs typeface="Times New Roman" pitchFamily="34" charset="-120"/>
               </a:rPr>
-              <a:t>References</a:t>
+              <a:t>Teacher's Note</a:t>
             </a:r>
             <a:endParaRPr lang="en-US" sz="3600" dirty="0"/>
           </a:p>
@@ -20634,8 +20845,8 @@
         </p:nvSpPr>
         <p:spPr>
           <a:xfrm>
-            <a:off x="2697480" y="1783080"/>
-            <a:ext cx="9174175" cy="4663440"/>
+            <a:off x="5349240" y="1783080"/>
+            <a:ext cx="6522415" cy="4663440"/>
           </a:xfrm>
           <a:prstGeom prst="rect">
             <a:avLst/>
@@ -20655,7 +20866,7 @@
               <a:buChar char="•"/>
             </a:pPr>
             <a:r>
-              <a:rPr lang="en-US" sz="1800" dirty="0">
+              <a:rPr lang="en-US" sz="2000" dirty="0">
                 <a:solidFill>
                   <a:srgbClr val="111111"/>
                 </a:solidFill>
@@ -20663,9 +20874,9 @@
                 <a:ea typeface="Calibri" pitchFamily="34" charset="-122"/>
                 <a:cs typeface="Calibri" pitchFamily="34" charset="-120"/>
               </a:rPr>
-              <a:t>Geography Syllabus, Forms I–V, MINESEC (2023) — Form 4, Module II: Development and the Management of Primary Resources.</a:t>
-            </a:r>
-            <a:endParaRPr lang="en-US" sz="1800" dirty="0"/>
+              <a:t>Timing: Homework correction, plan, objectives 8 min | Recall, situation, action 10 min | 5 activities 30 min | Board summary (copying) 30 min | Evaluation, remediation 10 min | Homework, next lesson 5 min | Logbook 7 min</a:t>
+            </a:r>
+            <a:endParaRPr lang="en-US" sz="2000" dirty="0"/>
           </a:p>
           <a:p>
             <a:pPr algn="l" marL="342900" indent="-342900">
@@ -20676,7 +20887,7 @@
               <a:buChar char="•"/>
             </a:pPr>
             <a:r>
-              <a:rPr lang="en-US" sz="1800" dirty="0">
+              <a:rPr lang="en-US" sz="2000" dirty="0">
                 <a:solidFill>
                   <a:srgbClr val="111111"/>
                 </a:solidFill>
@@ -20684,9 +20895,9 @@
                 <a:ea typeface="Calibri" pitchFamily="34" charset="-122"/>
                 <a:cs typeface="Calibri" pitchFamily="34" charset="-120"/>
               </a:rPr>
-              <a:t>Photo, Activity 2: “Logging truck, Cameroon” by World Resources, CC BY-NC-SA 2.0, via Flickr (https://www.flickr.com/photos/26107309@N05/4764354366)</a:t>
-            </a:r>
-            <a:endParaRPr lang="en-US" sz="1800" dirty="0"/>
+              <a:t>Without the projector (Activity 1): use the atlas.</a:t>
+            </a:r>
+            <a:endParaRPr lang="en-US" sz="2000" dirty="0"/>
           </a:p>
           <a:p>
             <a:pPr algn="l" marL="342900" indent="-342900">
@@ -20697,7 +20908,7 @@
               <a:buChar char="•"/>
             </a:pPr>
             <a:r>
-              <a:rPr lang="en-US" sz="1800" dirty="0">
+              <a:rPr lang="en-US" sz="2000" dirty="0">
                 <a:solidFill>
                   <a:srgbClr val="111111"/>
                 </a:solidFill>
@@ -20705,9 +20916,9 @@
                 <a:ea typeface="Calibri" pitchFamily="34" charset="-122"/>
                 <a:cs typeface="Calibri" pitchFamily="34" charset="-120"/>
               </a:rPr>
-              <a:t>Photo, Activity 3: “Amazon 11” by CIAT International Center for Tropical Agriculture, CC BY-SA 2.0, via Flickr (https://www.flickr.com/photos/38476503@N08/5641587148)</a:t>
-            </a:r>
-            <a:endParaRPr lang="en-US" sz="1800" dirty="0"/>
+              <a:t>Without the projector (Activity 2): list products.</a:t>
+            </a:r>
+            <a:endParaRPr lang="en-US" sz="2000" dirty="0"/>
           </a:p>
           <a:p>
             <a:pPr algn="l" marL="342900" indent="-342900">
@@ -20718,7 +20929,7 @@
               <a:buChar char="•"/>
             </a:pPr>
             <a:r>
-              <a:rPr lang="en-US" sz="1800" dirty="0">
+              <a:rPr lang="en-US" sz="2000" dirty="0">
                 <a:solidFill>
                   <a:srgbClr val="111111"/>
                 </a:solidFill>
@@ -20726,9 +20937,9 @@
                 <a:ea typeface="Calibri" pitchFamily="34" charset="-122"/>
                 <a:cs typeface="Calibri" pitchFamily="34" charset="-120"/>
               </a:rPr>
-              <a:t>Photo, Activity 4: “CBCF Project, Yogyakarta” by CIFOR, CC BY-NC-ND 2.0, via Flickr (https://www.flickr.com/photos/45423546@N07/35977173724)</a:t>
-            </a:r>
-            <a:endParaRPr lang="en-US" sz="1800" dirty="0"/>
+              <a:t>Without the projector (Activity 3): discuss.</a:t>
+            </a:r>
+            <a:endParaRPr lang="en-US" sz="2000" dirty="0"/>
           </a:p>
           <a:p>
             <a:pPr algn="l" marL="342900" indent="-342900">
@@ -20739,7 +20950,7 @@
               <a:buChar char="•"/>
             </a:pPr>
             <a:r>
-              <a:rPr lang="en-US" sz="1800" dirty="0">
+              <a:rPr lang="en-US" sz="2000" dirty="0">
                 <a:solidFill>
                   <a:srgbClr val="111111"/>
                 </a:solidFill>
@@ -20747,9 +20958,9 @@
                 <a:ea typeface="Calibri" pitchFamily="34" charset="-122"/>
                 <a:cs typeface="Calibri" pitchFamily="34" charset="-120"/>
               </a:rPr>
-              <a:t>Photo, Activity 5: “Haitian Students Breathe New Life into Depleted Pine Forest” by United Nations Photo, CC BY-NC-ND 2.0, via Flickr (https://www.flickr.com/photos/35483578@N03/5860275159)</a:t>
-            </a:r>
-            <a:endParaRPr lang="en-US" sz="1800" dirty="0"/>
+              <a:t>Without the projector (Activity 4): discuss.</a:t>
+            </a:r>
+            <a:endParaRPr lang="en-US" sz="2000" dirty="0"/>
           </a:p>
           <a:p>
             <a:pPr algn="l" marL="342900" indent="-342900">
@@ -20760,7 +20971,7 @@
               <a:buChar char="•"/>
             </a:pPr>
             <a:r>
-              <a:rPr lang="en-US" sz="1800" dirty="0">
+              <a:rPr lang="en-US" sz="2000" dirty="0">
                 <a:solidFill>
                   <a:srgbClr val="111111"/>
                 </a:solidFill>
@@ -20768,9 +20979,9 @@
                 <a:ea typeface="Calibri" pitchFamily="34" charset="-122"/>
                 <a:cs typeface="Calibri" pitchFamily="34" charset="-120"/>
               </a:rPr>
-              <a:t>Diagrams and animations: drawn for this lesson (Geography Department).</a:t>
-            </a:r>
-            <a:endParaRPr lang="en-US" sz="1800" dirty="0"/>
+              <a:t>Without the projector (Activity 5): list methods.</a:t>
+            </a:r>
+            <a:endParaRPr lang="en-US" sz="2000" dirty="0"/>
           </a:p>
         </p:txBody>
       </p:sp>
@@ -20817,6 +21028,331 @@
             <a:fld id="{F7021451-1387-4CA6-816F-3879F97B5CBC}" type="slidenum">
               <a:rPr b="1" lang="en-US"/>
               <a:t>53</a:t>
+            </a:fld>
+            <a:endParaRPr lang="en-US"/>
+          </a:p>
+        </p:txBody>
+      </p:sp>
+    </p:spTree>
+  </p:cSld>
+  <p:clrMapOvr>
+    <a:masterClrMapping/>
+  </p:clrMapOvr>
+</p:sld>
+</file>
+
+<file path=ppt/slides/slide54.xml><?xml version="1.0" encoding="utf-8"?>
+<p:sld xmlns:a="http://schemas.openxmlformats.org/drawingml/2006/main" xmlns:r="http://schemas.openxmlformats.org/officeDocument/2006/relationships" xmlns:p="http://schemas.openxmlformats.org/presentationml/2006/main">
+  <p:cSld name="Slide 54">
+    <p:spTree>
+      <p:nvGrpSpPr>
+        <p:cNvPr id="1" name=""/>
+        <p:cNvGrpSpPr/>
+        <p:nvPr/>
+      </p:nvGrpSpPr>
+      <p:grpSpPr>
+        <a:xfrm>
+          <a:off x="0" y="0"/>
+          <a:ext cx="0" cy="0"/>
+          <a:chOff x="0" y="0"/>
+          <a:chExt cx="0" cy="0"/>
+        </a:xfrm>
+      </p:grpSpPr>
+      <p:sp>
+        <p:nvSpPr>
+          <p:cNvPr id="2" name="Text 0"/>
+          <p:cNvSpPr/>
+          <p:nvPr/>
+        </p:nvSpPr>
+        <p:spPr>
+          <a:xfrm>
+            <a:off x="457200" y="713232"/>
+            <a:ext cx="11368735" cy="274320"/>
+          </a:xfrm>
+          <a:prstGeom prst="rect">
+            <a:avLst/>
+          </a:prstGeom>
+          <a:noFill/>
+          <a:ln/>
+        </p:spPr>
+        <p:txBody>
+          <a:bodyPr wrap="square" lIns="0" tIns="0" rIns="0" bIns="0" rtlCol="0" anchor="ctr"/>
+          <a:lstStyle/>
+          <a:p>
+            <a:pPr algn="r" indent="0" marL="0">
+              <a:buNone/>
+            </a:pPr>
+            <a:r>
+              <a:rPr lang="en-US" sz="1400" b="1" dirty="0">
+                <a:solidFill>
+                  <a:srgbClr val="1C3F6E"/>
+                </a:solidFill>
+                <a:latin typeface="Calibri" pitchFamily="34" charset="0"/>
+                <a:ea typeface="Calibri" pitchFamily="34" charset="-122"/>
+                <a:cs typeface="Calibri" pitchFamily="34" charset="-120"/>
+              </a:rPr>
+              <a:t>REFERENCES</a:t>
+            </a:r>
+            <a:endParaRPr lang="en-US" sz="1400" dirty="0"/>
+          </a:p>
+        </p:txBody>
+      </p:sp>
+      <p:pic>
+        <p:nvPicPr>
+          <p:cNvPr id="3" name="Image 0" descr="/home/claude/f4/img/minesec_sheet.png">    </p:cNvPr>
+          <p:cNvPicPr>
+            <a:picLocks noChangeAspect="1"/>
+          </p:cNvPicPr>
+          <p:nvPr/>
+        </p:nvPicPr>
+        <p:blipFill>
+          <a:blip r:embed="rId1"/>
+          <a:stretch>
+            <a:fillRect/>
+          </a:stretch>
+        </p:blipFill>
+        <p:spPr>
+          <a:xfrm>
+            <a:off x="0" y="658368"/>
+            <a:ext cx="2468880" cy="5833872"/>
+          </a:xfrm>
+          <a:prstGeom prst="rect">
+            <a:avLst/>
+          </a:prstGeom>
+        </p:spPr>
+      </p:pic>
+      <p:sp>
+        <p:nvSpPr>
+          <p:cNvPr id="4" name="Text 1"/>
+          <p:cNvSpPr/>
+          <p:nvPr/>
+        </p:nvSpPr>
+        <p:spPr>
+          <a:xfrm>
+            <a:off x="2697480" y="1005840"/>
+            <a:ext cx="9174175" cy="731520"/>
+          </a:xfrm>
+          <a:prstGeom prst="rect">
+            <a:avLst/>
+          </a:prstGeom>
+          <a:noFill/>
+          <a:ln/>
+        </p:spPr>
+        <p:txBody>
+          <a:bodyPr wrap="square" lIns="0" tIns="0" rIns="0" bIns="0" rtlCol="0" anchor="ctr">
+            <a:normAutofit/>
+          </a:bodyPr>
+          <a:lstStyle/>
+          <a:p>
+            <a:pPr algn="ctr" indent="0" marL="0">
+              <a:buNone/>
+            </a:pPr>
+            <a:r>
+              <a:rPr lang="en-US" sz="3600" b="1" dirty="0">
+                <a:solidFill>
+                  <a:srgbClr val="990011"/>
+                </a:solidFill>
+                <a:latin typeface="Times New Roman" pitchFamily="34" charset="0"/>
+                <a:ea typeface="Times New Roman" pitchFamily="34" charset="-122"/>
+                <a:cs typeface="Times New Roman" pitchFamily="34" charset="-120"/>
+              </a:rPr>
+              <a:t>References</a:t>
+            </a:r>
+            <a:endParaRPr lang="en-US" sz="3600" dirty="0"/>
+          </a:p>
+        </p:txBody>
+      </p:sp>
+      <p:sp>
+        <p:nvSpPr>
+          <p:cNvPr id="5" name="Text 2"/>
+          <p:cNvSpPr/>
+          <p:nvPr/>
+        </p:nvSpPr>
+        <p:spPr>
+          <a:xfrm>
+            <a:off x="2697480" y="1783080"/>
+            <a:ext cx="9174175" cy="4663440"/>
+          </a:xfrm>
+          <a:prstGeom prst="rect">
+            <a:avLst/>
+          </a:prstGeom>
+          <a:noFill/>
+          <a:ln/>
+        </p:spPr>
+        <p:txBody>
+          <a:bodyPr wrap="square" lIns="0" tIns="0" rIns="0" bIns="0" rtlCol="0" anchor="t"/>
+          <a:lstStyle/>
+          <a:p>
+            <a:pPr algn="l" marL="342900" indent="-342900">
+              <a:spcAft>
+                <a:spcPts val="800"/>
+              </a:spcAft>
+              <a:buSzPct val="100000"/>
+              <a:buChar char="•"/>
+            </a:pPr>
+            <a:r>
+              <a:rPr lang="en-US" sz="1800" dirty="0">
+                <a:solidFill>
+                  <a:srgbClr val="111111"/>
+                </a:solidFill>
+                <a:latin typeface="Calibri" pitchFamily="34" charset="0"/>
+                <a:ea typeface="Calibri" pitchFamily="34" charset="-122"/>
+                <a:cs typeface="Calibri" pitchFamily="34" charset="-120"/>
+              </a:rPr>
+              <a:t>Geography Syllabus, Forms I–V, MINESEC (2023) — Form 4, Module II: Development and the Management of Primary Resources.</a:t>
+            </a:r>
+            <a:endParaRPr lang="en-US" sz="1800" dirty="0"/>
+          </a:p>
+          <a:p>
+            <a:pPr algn="l" marL="342900" indent="-342900">
+              <a:spcAft>
+                <a:spcPts val="800"/>
+              </a:spcAft>
+              <a:buSzPct val="100000"/>
+              <a:buChar char="•"/>
+            </a:pPr>
+            <a:r>
+              <a:rPr lang="en-US" sz="1800" dirty="0">
+                <a:solidFill>
+                  <a:srgbClr val="111111"/>
+                </a:solidFill>
+                <a:latin typeface="Calibri" pitchFamily="34" charset="0"/>
+                <a:ea typeface="Calibri" pitchFamily="34" charset="-122"/>
+                <a:cs typeface="Calibri" pitchFamily="34" charset="-120"/>
+              </a:rPr>
+              <a:t>Photo, Activity 2: “Logging truck, Cameroon” by World Resources, CC BY-NC-SA 2.0, via Flickr (https://www.flickr.com/photos/26107309@N05/4764354366)</a:t>
+            </a:r>
+            <a:endParaRPr lang="en-US" sz="1800" dirty="0"/>
+          </a:p>
+          <a:p>
+            <a:pPr algn="l" marL="342900" indent="-342900">
+              <a:spcAft>
+                <a:spcPts val="800"/>
+              </a:spcAft>
+              <a:buSzPct val="100000"/>
+              <a:buChar char="•"/>
+            </a:pPr>
+            <a:r>
+              <a:rPr lang="en-US" sz="1800" dirty="0">
+                <a:solidFill>
+                  <a:srgbClr val="111111"/>
+                </a:solidFill>
+                <a:latin typeface="Calibri" pitchFamily="34" charset="0"/>
+                <a:ea typeface="Calibri" pitchFamily="34" charset="-122"/>
+                <a:cs typeface="Calibri" pitchFamily="34" charset="-120"/>
+              </a:rPr>
+              <a:t>Photo, Activity 3: “Amazon 11” by CIAT International Center for Tropical Agriculture, CC BY-SA 2.0, via Flickr (https://www.flickr.com/photos/38476503@N08/5641587148)</a:t>
+            </a:r>
+            <a:endParaRPr lang="en-US" sz="1800" dirty="0"/>
+          </a:p>
+          <a:p>
+            <a:pPr algn="l" marL="342900" indent="-342900">
+              <a:spcAft>
+                <a:spcPts val="800"/>
+              </a:spcAft>
+              <a:buSzPct val="100000"/>
+              <a:buChar char="•"/>
+            </a:pPr>
+            <a:r>
+              <a:rPr lang="en-US" sz="1800" dirty="0">
+                <a:solidFill>
+                  <a:srgbClr val="111111"/>
+                </a:solidFill>
+                <a:latin typeface="Calibri" pitchFamily="34" charset="0"/>
+                <a:ea typeface="Calibri" pitchFamily="34" charset="-122"/>
+                <a:cs typeface="Calibri" pitchFamily="34" charset="-120"/>
+              </a:rPr>
+              <a:t>Photo, Activity 4: “CBCF Project, Yogyakarta” by CIFOR, CC BY-NC-ND 2.0, via Flickr (https://www.flickr.com/photos/45423546@N07/35977173724)</a:t>
+            </a:r>
+            <a:endParaRPr lang="en-US" sz="1800" dirty="0"/>
+          </a:p>
+          <a:p>
+            <a:pPr algn="l" marL="342900" indent="-342900">
+              <a:spcAft>
+                <a:spcPts val="800"/>
+              </a:spcAft>
+              <a:buSzPct val="100000"/>
+              <a:buChar char="•"/>
+            </a:pPr>
+            <a:r>
+              <a:rPr lang="en-US" sz="1800" dirty="0">
+                <a:solidFill>
+                  <a:srgbClr val="111111"/>
+                </a:solidFill>
+                <a:latin typeface="Calibri" pitchFamily="34" charset="0"/>
+                <a:ea typeface="Calibri" pitchFamily="34" charset="-122"/>
+                <a:cs typeface="Calibri" pitchFamily="34" charset="-120"/>
+              </a:rPr>
+              <a:t>Photo, Activity 5: “Haitian Students Breathe New Life into Depleted Pine Forest” by United Nations Photo, CC BY-NC-ND 2.0, via Flickr (https://www.flickr.com/photos/35483578@N03/5860275159)</a:t>
+            </a:r>
+            <a:endParaRPr lang="en-US" sz="1800" dirty="0"/>
+          </a:p>
+          <a:p>
+            <a:pPr algn="l" marL="342900" indent="-342900">
+              <a:spcAft>
+                <a:spcPts val="800"/>
+              </a:spcAft>
+              <a:buSzPct val="100000"/>
+              <a:buChar char="•"/>
+            </a:pPr>
+            <a:r>
+              <a:rPr lang="en-US" sz="1800" dirty="0">
+                <a:solidFill>
+                  <a:srgbClr val="111111"/>
+                </a:solidFill>
+                <a:latin typeface="Calibri" pitchFamily="34" charset="0"/>
+                <a:ea typeface="Calibri" pitchFamily="34" charset="-122"/>
+                <a:cs typeface="Calibri" pitchFamily="34" charset="-120"/>
+              </a:rPr>
+              <a:t>Diagrams and animations: drawn for this lesson (Geography Department).</a:t>
+            </a:r>
+            <a:endParaRPr lang="en-US" sz="1800" dirty="0"/>
+          </a:p>
+        </p:txBody>
+      </p:sp>
+      <p:sp>
+        <p:nvSpPr>
+          <p:cNvPr id="25" name="Slide Number Placeholder 0"/>
+          <p:cNvSpPr>
+            <a:spLocks noGrp="1"/>
+          </p:cNvSpPr>
+          <p:nvPr>
+            <p:ph type="sldNum" sz="quarter" idx="4294967295"/>
+          </p:nvPr>
+        </p:nvSpPr>
+        <p:spPr>
+          <a:xfrm>
+            <a:off x="27432" y="91440"/>
+            <a:ext cx="585216" cy="475488"/>
+          </a:xfrm>
+          <a:prstGeom prst="rect">
+            <a:avLst/>
+          </a:prstGeom>
+          <a:extLst>
+            <a:ext uri="{C572A759-6A51-4108-AA02-DFA0A04FC94B}">
+              <ma14:wrappingTextBoxFlag xmlns:ma14="http://schemas.microsoft.com/office/mac/drawingml/2011/main" val="0"/>
+            </a:ext>
+          </a:extLst>
+        </p:spPr>
+        <p:txBody>
+          <a:bodyPr/>
+          <a:lstStyle>
+            <a:lvl1pPr>
+              <a:defRPr sz="2000">
+                <a:solidFill>
+                  <a:srgbClr val="FFFFFF"/>
+                </a:solidFill>
+                <a:latin typeface="Calibri"/>
+                <a:ea typeface="Calibri"/>
+                <a:cs typeface="Calibri"/>
+              </a:defRPr>
+            </a:lvl1pPr>
+          </a:lstStyle>
+          <a:p>
+            <a:pPr algn="ctr"/>
+            <a:fld id="{F7021451-1387-4CA6-816F-3879F97B5CBC}" type="slidenum">
+              <a:rPr b="1" lang="en-US"/>
+              <a:t>54</a:t>
             </a:fld>
             <a:endParaRPr lang="en-US"/>
           </a:p>
